--- a/docs/proposal/mashinani.pptx
+++ b/docs/proposal/mashinani.pptx
@@ -91,7 +91,7 @@
         <p:txBody>
           <a:bodyPr/>
           <a:p>
-            <a:fld id="{A5CE67C4-E368-40BD-BA2E-BD6B7FA38EEE}" type="slidenum">
+            <a:fld id="{E382F7EE-7B39-41EA-AFDD-68243092035C}" type="slidenum">
               <a:t>&lt;#&gt;</a:t>
             </a:fld>
           </a:p>
@@ -300,7 +300,7 @@
         <p:txBody>
           <a:bodyPr/>
           <a:p>
-            <a:fld id="{6691100E-88C0-4285-A50C-E335949B4057}" type="slidenum">
+            <a:fld id="{2ABCD7E0-10AE-4484-A453-7D51A8367120}" type="slidenum">
               <a:t>&lt;#&gt;</a:t>
             </a:fld>
           </a:p>
@@ -595,7 +595,7 @@
         <p:txBody>
           <a:bodyPr/>
           <a:p>
-            <a:fld id="{E65C1A08-316B-4CC7-8E06-94979A3FD900}" type="slidenum">
+            <a:fld id="{810E0F5C-11C9-47F4-9454-126F47BFD21E}" type="slidenum">
               <a:t>&lt;#&gt;</a:t>
             </a:fld>
           </a:p>
@@ -976,7 +976,7 @@
         <p:txBody>
           <a:bodyPr/>
           <a:p>
-            <a:fld id="{B5541616-0907-4AEC-A4EC-D61C44FC0826}" type="slidenum">
+            <a:fld id="{489F935C-55D0-4EC2-9D3D-F9C6AD15DBB5}" type="slidenum">
               <a:t>&lt;#&gt;</a:t>
             </a:fld>
           </a:p>
@@ -1139,7 +1139,7 @@
         <p:txBody>
           <a:bodyPr/>
           <a:p>
-            <a:fld id="{57CBDBDA-315F-4371-A3FF-D49162FD243B}" type="slidenum">
+            <a:fld id="{37EF08C7-AE5F-462C-A2B1-3532A7E807E1}" type="slidenum">
               <a:t>&lt;#&gt;</a:t>
             </a:fld>
           </a:p>
@@ -1305,7 +1305,7 @@
         <p:txBody>
           <a:bodyPr/>
           <a:p>
-            <a:fld id="{4E1FCBB7-C9E1-4693-98E4-F7678C207D80}" type="slidenum">
+            <a:fld id="{264FA234-0AD3-4BD6-B61C-06F649C8ECD1}" type="slidenum">
               <a:t>&lt;#&gt;</a:t>
             </a:fld>
           </a:p>
@@ -1514,7 +1514,7 @@
         <p:txBody>
           <a:bodyPr/>
           <a:p>
-            <a:fld id="{A7D5092D-A213-42A1-973F-41B38CBE8918}" type="slidenum">
+            <a:fld id="{8F470B30-25D6-4317-A9C8-C90AF411F6EC}" type="slidenum">
               <a:t>&lt;#&gt;</a:t>
             </a:fld>
           </a:p>
@@ -1637,7 +1637,7 @@
         <p:txBody>
           <a:bodyPr/>
           <a:p>
-            <a:fld id="{ED44CE57-58B9-431E-83C7-7A802C300C2D}" type="slidenum">
+            <a:fld id="{383F0920-AE72-4D04-9C9D-7B7A17A720A3}" type="slidenum">
               <a:t>&lt;#&gt;</a:t>
             </a:fld>
           </a:p>
@@ -1758,7 +1758,7 @@
         <p:txBody>
           <a:bodyPr/>
           <a:p>
-            <a:fld id="{65AB7624-3E79-4F12-ADC9-39780E5BB83F}" type="slidenum">
+            <a:fld id="{52D436AE-19F1-4C76-8553-A7871C1FCDBF}" type="slidenum">
               <a:t>&lt;#&gt;</a:t>
             </a:fld>
           </a:p>
@@ -2010,7 +2010,7 @@
         <p:txBody>
           <a:bodyPr/>
           <a:p>
-            <a:fld id="{8B09665C-93BC-414F-8C31-2731EF0004BE}" type="slidenum">
+            <a:fld id="{F8966085-BDC8-4295-9D8F-024652B6C105}" type="slidenum">
               <a:t>&lt;#&gt;</a:t>
             </a:fld>
           </a:p>
@@ -2262,7 +2262,7 @@
         <p:txBody>
           <a:bodyPr/>
           <a:p>
-            <a:fld id="{1B5DF435-6D39-4533-A4E0-E0EE597B9A9F}" type="slidenum">
+            <a:fld id="{30C122EB-5902-4205-A80C-B414160246C0}" type="slidenum">
               <a:t>&lt;#&gt;</a:t>
             </a:fld>
           </a:p>
@@ -2514,7 +2514,7 @@
         <p:txBody>
           <a:bodyPr/>
           <a:p>
-            <a:fld id="{90D25408-A09D-4429-8CAB-CA42621B6038}" type="slidenum">
+            <a:fld id="{BCBA15B1-1AB9-443D-B971-13CA428DAD51}" type="slidenum">
               <a:t>&lt;#&gt;</a:t>
             </a:fld>
           </a:p>
@@ -3179,7 +3179,7 @@
             <a:pPr indent="0" algn="r">
               <a:buNone/>
             </a:pPr>
-            <a:fld id="{CD199A07-1221-4151-85EB-99E828C89F26}" type="slidenum">
+            <a:fld id="{3693BD62-9ADA-4372-8A75-4E7A6F070C46}" type="slidenum">
               <a:rPr b="0" lang="en-US" sz="1400" spc="-1" strike="noStrike">
                 <a:solidFill>
                   <a:srgbClr val="eeeeee"/>
@@ -3385,10 +3385,10 @@
         </p:spPr>
         <p:txBody>
           <a:bodyPr lIns="0" rIns="0" tIns="0" bIns="0" anchor="t">
-            <a:normAutofit/>
-          </a:bodyPr>
-          <a:p>
-            <a:pPr marL="432000" indent="0">
+            <a:normAutofit fontScale="96000"/>
+          </a:bodyPr>
+          <a:p>
+            <a:pPr marL="414720" indent="0">
               <a:spcAft>
                 <a:spcPts val="1057"/>
               </a:spcAft>
@@ -3411,7 +3411,7 @@
             </a:endParaRPr>
           </a:p>
           <a:p>
-            <a:pPr marL="432000" indent="-324000">
+            <a:pPr marL="414720" indent="-311040">
               <a:spcAft>
                 <a:spcPts val="1057"/>
               </a:spcAft>
@@ -3429,17 +3429,17 @@
                 </a:solidFill>
                 <a:latin typeface="Arial"/>
               </a:rPr>
-              <a:t>To design and implement  a user-friendly interface.</a:t>
-            </a:r>
-            <a:endParaRPr b="0" lang="en-US" sz="2000" spc="-1" strike="noStrike">
-              <a:solidFill>
-                <a:srgbClr val="000000"/>
-              </a:solidFill>
-              <a:latin typeface="Arial"/>
-            </a:endParaRPr>
-          </a:p>
-          <a:p>
-            <a:pPr marL="432000" indent="-324000">
+              <a:t>To conduct a comprehensive analysis of the requirements gathered from stakeholders at the conceptual design phase.</a:t>
+            </a:r>
+            <a:endParaRPr b="0" lang="en-US" sz="2000" spc="-1" strike="noStrike">
+              <a:solidFill>
+                <a:srgbClr val="000000"/>
+              </a:solidFill>
+              <a:latin typeface="Arial"/>
+            </a:endParaRPr>
+          </a:p>
+          <a:p>
+            <a:pPr marL="414720" indent="-311040">
               <a:spcAft>
                 <a:spcPts val="1057"/>
               </a:spcAft>
@@ -3457,17 +3457,17 @@
                 </a:solidFill>
                 <a:latin typeface="Arial"/>
               </a:rPr>
-              <a:t>To design and implement a secure database.</a:t>
-            </a:r>
-            <a:endParaRPr b="0" lang="en-US" sz="2000" spc="-1" strike="noStrike">
-              <a:solidFill>
-                <a:srgbClr val="000000"/>
-              </a:solidFill>
-              <a:latin typeface="Arial"/>
-            </a:endParaRPr>
-          </a:p>
-          <a:p>
-            <a:pPr marL="432000" indent="-324000">
+              <a:t>To develop a detailed system design based on the conceptual design, outlining the architecture, components, and data structures.</a:t>
+            </a:r>
+            <a:endParaRPr b="0" lang="en-US" sz="2000" spc="-1" strike="noStrike">
+              <a:solidFill>
+                <a:srgbClr val="000000"/>
+              </a:solidFill>
+              <a:latin typeface="Arial"/>
+            </a:endParaRPr>
+          </a:p>
+          <a:p>
+            <a:pPr marL="414720" indent="-311040">
               <a:spcAft>
                 <a:spcPts val="1057"/>
               </a:spcAft>
@@ -3485,17 +3485,17 @@
                 </a:solidFill>
                 <a:latin typeface="Arial"/>
               </a:rPr>
-              <a:t>To design and implement bursary application algorithm.</a:t>
-            </a:r>
-            <a:endParaRPr b="0" lang="en-US" sz="2000" spc="-1" strike="noStrike">
-              <a:solidFill>
-                <a:srgbClr val="000000"/>
-              </a:solidFill>
-              <a:latin typeface="Arial"/>
-            </a:endParaRPr>
-          </a:p>
-          <a:p>
-            <a:pPr marL="432000" indent="-324000">
+              <a:t>To implement the functionalities and features outlined in the conceptual design.</a:t>
+            </a:r>
+            <a:endParaRPr b="0" lang="en-US" sz="2000" spc="-1" strike="noStrike">
+              <a:solidFill>
+                <a:srgbClr val="000000"/>
+              </a:solidFill>
+              <a:latin typeface="Arial"/>
+            </a:endParaRPr>
+          </a:p>
+          <a:p>
+            <a:pPr marL="414720" indent="-311040">
               <a:spcAft>
                 <a:spcPts val="1057"/>
               </a:spcAft>
@@ -3513,7 +3513,35 @@
                 </a:solidFill>
                 <a:latin typeface="Arial"/>
               </a:rPr>
-              <a:t>To design and implement bursary application progress tracking algorithm.</a:t>
+              <a:t>To conduct thorough testing at each iteration to ensure that individual components and features meet specified requirements.</a:t>
+            </a:r>
+            <a:endParaRPr b="0" lang="en-US" sz="2000" spc="-1" strike="noStrike">
+              <a:solidFill>
+                <a:srgbClr val="000000"/>
+              </a:solidFill>
+              <a:latin typeface="Arial"/>
+            </a:endParaRPr>
+          </a:p>
+          <a:p>
+            <a:pPr marL="414720" indent="-311040">
+              <a:spcAft>
+                <a:spcPts val="1057"/>
+              </a:spcAft>
+              <a:buClr>
+                <a:srgbClr val="91d93f"/>
+              </a:buClr>
+              <a:buSzPct val="45000"/>
+              <a:buFont typeface="Wingdings" charset="2"/>
+              <a:buChar char=""/>
+            </a:pPr>
+            <a:r>
+              <a:rPr b="0" lang="en-US" sz="2000" spc="-1" strike="noStrike">
+                <a:solidFill>
+                  <a:srgbClr val="000000"/>
+                </a:solidFill>
+                <a:latin typeface="Arial"/>
+              </a:rPr>
+              <a:t>To deploy the portal to a live environment, making it accessible to users for real-world application and testing.</a:t>
             </a:r>
             <a:endParaRPr b="0" lang="en-US" sz="2000" spc="-1" strike="noStrike">
               <a:solidFill>
@@ -4374,7 +4402,30 @@
                 </a:solidFill>
                 <a:latin typeface="Arial"/>
               </a:rPr>
-              <a:t>Real-Time Application Status Updates: </a:t>
+              <a:t>5.3.1 Features</a:t>
+            </a:r>
+            <a:endParaRPr b="0" lang="en-US" sz="2000" spc="-1" strike="noStrike">
+              <a:solidFill>
+                <a:srgbClr val="000000"/>
+              </a:solidFill>
+              <a:latin typeface="Arial"/>
+            </a:endParaRPr>
+          </a:p>
+          <a:p>
+            <a:pPr marL="432000" indent="0">
+              <a:spcAft>
+                <a:spcPts val="1057"/>
+              </a:spcAft>
+              <a:buNone/>
+            </a:pPr>
+            <a:r>
+              <a:rPr b="1" lang="en-US" sz="2000" spc="-1" strike="noStrike">
+                <a:solidFill>
+                  <a:srgbClr val="000000"/>
+                </a:solidFill>
+                <a:latin typeface="Arial"/>
+              </a:rPr>
+              <a:t>5.3.1.1 Real-Time Application Status Updates: </a:t>
             </a:r>
             <a:r>
               <a:rPr b="0" lang="en-US" sz="2000" spc="-1" strike="noStrike">
@@ -4535,10 +4586,10 @@
         </p:spPr>
         <p:txBody>
           <a:bodyPr lIns="0" rIns="0" tIns="0" bIns="0" anchor="t">
-            <a:normAutofit fontScale="97000"/>
-          </a:bodyPr>
-          <a:p>
-            <a:pPr marL="419040" indent="0">
+            <a:normAutofit/>
+          </a:bodyPr>
+          <a:p>
+            <a:pPr marL="432000" indent="0">
               <a:spcAft>
                 <a:spcPts val="1057"/>
               </a:spcAft>
@@ -4551,17 +4602,26 @@
                 </a:solidFill>
                 <a:latin typeface="Arial"/>
               </a:rPr>
-              <a:t>5.3 Conceptual Design</a:t>
-            </a:r>
-            <a:endParaRPr b="0" lang="en-US" sz="2000" spc="-1" strike="noStrike">
-              <a:solidFill>
-                <a:srgbClr val="000000"/>
-              </a:solidFill>
-              <a:latin typeface="Arial"/>
-            </a:endParaRPr>
-          </a:p>
-          <a:p>
-            <a:pPr marL="419040" indent="0">
+              <a:t>5.3.1.2 One-Time Application Restrictions: </a:t>
+            </a:r>
+            <a:r>
+              <a:rPr b="0" lang="en-US" sz="2000" spc="-1" strike="noStrike">
+                <a:solidFill>
+                  <a:srgbClr val="000000"/>
+                </a:solidFill>
+                <a:latin typeface="Arial"/>
+              </a:rPr>
+              <a:t>To enhance accuracy and reduce redundancy, the design restricts the National ID and Student Registration Numbers to a one-time application per financial year. This feature aims to prevent errors and ensure that each applicant has a fair and equal opportunity for bursary consideration.</a:t>
+            </a:r>
+            <a:endParaRPr b="0" lang="en-US" sz="2000" spc="-1" strike="noStrike">
+              <a:solidFill>
+                <a:srgbClr val="000000"/>
+              </a:solidFill>
+              <a:latin typeface="Arial"/>
+            </a:endParaRPr>
+          </a:p>
+          <a:p>
+            <a:pPr marL="432000" indent="0">
               <a:spcAft>
                 <a:spcPts val="1057"/>
               </a:spcAft>
@@ -4574,39 +4634,7 @@
                 </a:solidFill>
                 <a:latin typeface="Arial"/>
               </a:rPr>
-              <a:t>One-Time Application Restrictions: </a:t>
-            </a:r>
-            <a:r>
-              <a:rPr b="0" lang="en-US" sz="2000" spc="-1" strike="noStrike">
-                <a:solidFill>
-                  <a:srgbClr val="000000"/>
-                </a:solidFill>
-                <a:latin typeface="Arial"/>
-              </a:rPr>
-              <a:t>To enhance accuracy and reduce redundancy, the design restricts the National ID and Student Registration Numbers to a one-time application per financial year. This feature aims to prevent errors and ensure that each applicant has a fair and equal opportunity for bursary consideration.</a:t>
-            </a:r>
-            <a:endParaRPr b="0" lang="en-US" sz="2000" spc="-1" strike="noStrike">
-              <a:solidFill>
-                <a:srgbClr val="000000"/>
-              </a:solidFill>
-              <a:latin typeface="Arial"/>
-            </a:endParaRPr>
-          </a:p>
-          <a:p>
-            <a:pPr marL="419040" indent="0">
-              <a:spcAft>
-                <a:spcPts val="1057"/>
-              </a:spcAft>
-              <a:buNone/>
-            </a:pPr>
-            <a:r>
-              <a:rPr b="1" lang="en-US" sz="2000" spc="-1" strike="noStrike">
-                <a:solidFill>
-                  <a:srgbClr val="000000"/>
-                </a:solidFill>
-                <a:latin typeface="Arial"/>
-              </a:rPr>
-              <a:t>Comprehensive Reporting System: </a:t>
+              <a:t>5.3.1.3 Comprehensive Reporting System: </a:t>
             </a:r>
             <a:r>
               <a:rPr b="0" lang="en-US" sz="2000" spc="-1" strike="noStrike">
@@ -4746,7 +4774,16 @@
                 </a:solidFill>
                 <a:latin typeface="Arial"/>
               </a:rPr>
-              <a:t>5.3 Conceptual Design</a:t>
+              <a:t>5.3.1.4 Secure Database: </a:t>
+            </a:r>
+            <a:r>
+              <a:rPr b="0" lang="en-US" sz="2000" spc="-1" strike="noStrike">
+                <a:solidFill>
+                  <a:srgbClr val="000000"/>
+                </a:solidFill>
+                <a:latin typeface="Arial"/>
+              </a:rPr>
+              <a:t>To ensure the integrity and security of applicant information, the conceptual design includes the implementation of a robust database system. Sensitive data, such as National ID numbers and student registration details, will be stored securely, minimizing the risk of unauthorized access or data breaches.</a:t>
             </a:r>
             <a:endParaRPr b="0" lang="en-US" sz="2000" spc="-1" strike="noStrike">
               <a:solidFill>
@@ -4771,29 +4808,6 @@
           </a:p>
         </p:txBody>
       </p:sp>
-      <p:pic>
-        <p:nvPicPr>
-          <p:cNvPr id="77" name="Bursary Mashinani Class Diagram" descr=""/>
-          <p:cNvPicPr/>
-          <p:nvPr/>
-        </p:nvPicPr>
-        <p:blipFill>
-          <a:blip r:embed="rId1"/>
-          <a:stretch/>
-        </p:blipFill>
-        <p:spPr>
-          <a:xfrm>
-            <a:off x="2971800" y="1600200"/>
-            <a:ext cx="3191760" cy="3429000"/>
-          </a:xfrm>
-          <a:prstGeom prst="rect">
-            <a:avLst/>
-          </a:prstGeom>
-          <a:ln w="10800">
-            <a:noFill/>
-          </a:ln>
-        </p:spPr>
-      </p:pic>
     </p:spTree>
   </p:cSld>
   <mc:AlternateContent>
@@ -4826,7 +4840,7 @@
       </p:grpSpPr>
       <p:sp>
         <p:nvSpPr>
-          <p:cNvPr id="78" name="PlaceHolder 1"/>
+          <p:cNvPr id="77" name="PlaceHolder 1"/>
           <p:cNvSpPr>
             <a:spLocks noGrp="1"/>
           </p:cNvSpPr>
@@ -4875,7 +4889,7 @@
       </p:sp>
       <p:sp>
         <p:nvSpPr>
-          <p:cNvPr id="79" name="PlaceHolder 2"/>
+          <p:cNvPr id="78" name="PlaceHolder 2"/>
           <p:cNvSpPr>
             <a:spLocks noGrp="1"/>
           </p:cNvSpPr>
@@ -4914,30 +4928,7 @@
                 </a:solidFill>
                 <a:latin typeface="Arial"/>
               </a:rPr>
-              <a:t>5.3 Conceptual Design</a:t>
-            </a:r>
-            <a:endParaRPr b="0" lang="en-US" sz="2000" spc="-1" strike="noStrike">
-              <a:solidFill>
-                <a:srgbClr val="000000"/>
-              </a:solidFill>
-              <a:latin typeface="Arial"/>
-            </a:endParaRPr>
-          </a:p>
-          <a:p>
-            <a:pPr marL="432000" indent="0">
-              <a:spcAft>
-                <a:spcPts val="1057"/>
-              </a:spcAft>
-              <a:buNone/>
-            </a:pPr>
-            <a:r>
-              <a:rPr b="1" lang="en-US" sz="2000" spc="-1" strike="noStrike">
-                <a:solidFill>
-                  <a:srgbClr val="000000"/>
-                </a:solidFill>
-                <a:latin typeface="Arial"/>
-              </a:rPr>
-              <a:t>Secure Database: </a:t>
+              <a:t>5.3.1.5 User-Friendly Interface: </a:t>
             </a:r>
             <a:r>
               <a:rPr b="0" lang="en-US" sz="2000" spc="-1" strike="noStrike">
@@ -4946,7 +4937,7 @@
                 </a:solidFill>
                 <a:latin typeface="Arial"/>
               </a:rPr>
-              <a:t>To ensure the integrity and security of applicant information, the conceptual design includes the implementation of a robust database system. Sensitive data, such as National ID numbers and student registration details, will be stored securely, minimizing the risk of unauthorized access or data breaches.</a:t>
+              <a:t>The conceptual design prioritizes the development of an intuitive and user-friendly interface. Applicants, including students, parents, and guardians, will find the portal easy to navigate, reducing the learning curve and ensuring accessibility for users with varying technological proficiencies.</a:t>
             </a:r>
             <a:endParaRPr b="0" lang="en-US" sz="2000" spc="-1" strike="noStrike">
               <a:solidFill>
@@ -5003,7 +4994,7 @@
       </p:grpSpPr>
       <p:sp>
         <p:nvSpPr>
-          <p:cNvPr id="80" name="PlaceHolder 1"/>
+          <p:cNvPr id="79" name="PlaceHolder 1"/>
           <p:cNvSpPr>
             <a:spLocks noGrp="1"/>
           </p:cNvSpPr>
@@ -5039,7 +5030,7 @@
                 </a:solidFill>
                 <a:latin typeface="Arial"/>
               </a:rPr>
-              <a:t>5. LITERATURE</a:t>
+              <a:t>5. LITERATURE:Landing Page</a:t>
             </a:r>
             <a:endParaRPr b="0" lang="en-US" sz="2700" spc="-1" strike="noStrike">
               <a:solidFill>
@@ -5052,7 +5043,7 @@
       </p:sp>
       <p:sp>
         <p:nvSpPr>
-          <p:cNvPr id="81" name="PlaceHolder 2"/>
+          <p:cNvPr id="80" name="PlaceHolder 2"/>
           <p:cNvSpPr>
             <a:spLocks noGrp="1"/>
           </p:cNvSpPr>
@@ -5078,30 +5069,7 @@
             <a:normAutofit/>
           </a:bodyPr>
           <a:p>
-            <a:pPr marL="432000" indent="0">
-              <a:spcAft>
-                <a:spcPts val="1057"/>
-              </a:spcAft>
-              <a:buNone/>
-            </a:pPr>
-            <a:r>
-              <a:rPr b="1" lang="en-US" sz="2000" spc="-1" strike="noStrike">
-                <a:solidFill>
-                  <a:srgbClr val="000000"/>
-                </a:solidFill>
-                <a:latin typeface="Arial"/>
-              </a:rPr>
-              <a:t>5.3 Conceptual Design</a:t>
-            </a:r>
-            <a:endParaRPr b="0" lang="en-US" sz="2000" spc="-1" strike="noStrike">
-              <a:solidFill>
-                <a:srgbClr val="000000"/>
-              </a:solidFill>
-              <a:latin typeface="Arial"/>
-            </a:endParaRPr>
-          </a:p>
-          <a:p>
-            <a:pPr marL="432000" indent="0">
+            <a:pPr indent="0">
               <a:spcAft>
                 <a:spcPts val="1057"/>
               </a:spcAft>
@@ -5118,18 +5086,19 @@
       </p:sp>
       <p:pic>
         <p:nvPicPr>
-          <p:cNvPr id="82" name="Bursary Mashinani Entity Relationship Diagram" descr=""/>
+          <p:cNvPr id="81" name="Landing Page" descr=""/>
           <p:cNvPicPr/>
           <p:nvPr/>
         </p:nvPicPr>
         <p:blipFill>
           <a:blip r:embed="rId1"/>
+          <a:srcRect l="6593" t="22005" r="11759" b="0"/>
           <a:stretch/>
         </p:blipFill>
         <p:spPr>
           <a:xfrm>
-            <a:off x="1811520" y="1600200"/>
-            <a:ext cx="6034680" cy="3271680"/>
+            <a:off x="685800" y="1149120"/>
+            <a:ext cx="8229240" cy="4108680"/>
           </a:xfrm>
           <a:prstGeom prst="rect">
             <a:avLst/>
@@ -5171,7 +5140,7 @@
       </p:grpSpPr>
       <p:sp>
         <p:nvSpPr>
-          <p:cNvPr id="83" name="PlaceHolder 1"/>
+          <p:cNvPr id="82" name="PlaceHolder 1"/>
           <p:cNvSpPr>
             <a:spLocks noGrp="1"/>
           </p:cNvSpPr>
@@ -5207,7 +5176,7 @@
                 </a:solidFill>
                 <a:latin typeface="Arial"/>
               </a:rPr>
-              <a:t>5. LITERATURE</a:t>
+              <a:t>5. LITERATURE: Application form page</a:t>
             </a:r>
             <a:endParaRPr b="0" lang="en-US" sz="2700" spc="-1" strike="noStrike">
               <a:solidFill>
@@ -5218,104 +5187,30 @@
           </a:p>
         </p:txBody>
       </p:sp>
-      <p:sp>
-        <p:nvSpPr>
-          <p:cNvPr id="84" name="PlaceHolder 2"/>
-          <p:cNvSpPr>
-            <a:spLocks noGrp="1"/>
-          </p:cNvSpPr>
-          <p:nvPr>
-            <p:ph/>
-          </p:nvPr>
-        </p:nvSpPr>
-        <p:spPr>
-          <a:xfrm>
-            <a:off x="540000" y="1350000"/>
-            <a:ext cx="9000000" cy="3600000"/>
-          </a:xfrm>
-          <a:prstGeom prst="rect">
-            <a:avLst/>
-          </a:prstGeom>
-          <a:noFill/>
-          <a:ln w="0">
-            <a:noFill/>
-          </a:ln>
-        </p:spPr>
-        <p:txBody>
-          <a:bodyPr lIns="0" rIns="0" tIns="0" bIns="0" anchor="t">
-            <a:normAutofit/>
-          </a:bodyPr>
-          <a:p>
-            <a:pPr marL="432000" indent="0">
-              <a:spcAft>
-                <a:spcPts val="1057"/>
-              </a:spcAft>
-              <a:buNone/>
-            </a:pPr>
-            <a:r>
-              <a:rPr b="1" lang="en-US" sz="2000" spc="-1" strike="noStrike">
-                <a:solidFill>
-                  <a:srgbClr val="000000"/>
-                </a:solidFill>
-                <a:latin typeface="Arial"/>
-              </a:rPr>
-              <a:t>5.3 Conceptual Design</a:t>
-            </a:r>
-            <a:endParaRPr b="0" lang="en-US" sz="2000" spc="-1" strike="noStrike">
-              <a:solidFill>
-                <a:srgbClr val="000000"/>
-              </a:solidFill>
-              <a:latin typeface="Arial"/>
-            </a:endParaRPr>
-          </a:p>
-          <a:p>
-            <a:pPr marL="432000" indent="0">
-              <a:spcAft>
-                <a:spcPts val="1057"/>
-              </a:spcAft>
-              <a:buNone/>
-            </a:pPr>
-            <a:r>
-              <a:rPr b="1" lang="en-US" sz="2000" spc="-1" strike="noStrike">
-                <a:solidFill>
-                  <a:srgbClr val="000000"/>
-                </a:solidFill>
-                <a:latin typeface="Arial"/>
-              </a:rPr>
-              <a:t>User-Friendly Interface: </a:t>
-            </a:r>
-            <a:r>
-              <a:rPr b="0" lang="en-US" sz="2000" spc="-1" strike="noStrike">
-                <a:solidFill>
-                  <a:srgbClr val="000000"/>
-                </a:solidFill>
-                <a:latin typeface="Arial"/>
-              </a:rPr>
-              <a:t>The conceptual design prioritizes the development of an intuitive and user-friendly interface. Applicants, including students, parents, and guardians, will find the portal easy to navigate, reducing the learning curve and ensuring accessibility for users with varying technological proficiencies.</a:t>
-            </a:r>
-            <a:endParaRPr b="0" lang="en-US" sz="2000" spc="-1" strike="noStrike">
-              <a:solidFill>
-                <a:srgbClr val="000000"/>
-              </a:solidFill>
-              <a:latin typeface="Arial"/>
-            </a:endParaRPr>
-          </a:p>
-          <a:p>
-            <a:pPr marL="432000" indent="0">
-              <a:spcAft>
-                <a:spcPts val="1057"/>
-              </a:spcAft>
-              <a:buNone/>
-            </a:pPr>
-            <a:endParaRPr b="0" lang="en-US" sz="2000" spc="-1" strike="noStrike">
-              <a:solidFill>
-                <a:srgbClr val="000000"/>
-              </a:solidFill>
-              <a:latin typeface="Arial"/>
-            </a:endParaRPr>
-          </a:p>
-        </p:txBody>
-      </p:sp>
+      <p:pic>
+        <p:nvPicPr>
+          <p:cNvPr id="83" name="" descr=""/>
+          <p:cNvPicPr/>
+          <p:nvPr/>
+        </p:nvPicPr>
+        <p:blipFill>
+          <a:blip r:embed="rId1"/>
+          <a:srcRect l="0" t="19644" r="0" b="0"/>
+          <a:stretch/>
+        </p:blipFill>
+        <p:spPr>
+          <a:xfrm>
+            <a:off x="1371600" y="1600200"/>
+            <a:ext cx="6887520" cy="2892600"/>
+          </a:xfrm>
+          <a:prstGeom prst="rect">
+            <a:avLst/>
+          </a:prstGeom>
+          <a:ln w="10800">
+            <a:noFill/>
+          </a:ln>
+        </p:spPr>
+      </p:pic>
     </p:spTree>
   </p:cSld>
   <mc:AlternateContent>
@@ -5694,7 +5589,7 @@
       </p:grpSpPr>
       <p:sp>
         <p:nvSpPr>
-          <p:cNvPr id="85" name="PlaceHolder 1"/>
+          <p:cNvPr id="84" name="PlaceHolder 1"/>
           <p:cNvSpPr>
             <a:spLocks noGrp="1"/>
           </p:cNvSpPr>
@@ -5730,61 +5625,9 @@
                 </a:solidFill>
                 <a:latin typeface="Arial"/>
               </a:rPr>
-              <a:t>5. LITERATURE</a:t>
+              <a:t>5. LITERATURE: Track Progress Page</a:t>
             </a:r>
             <a:endParaRPr b="0" lang="en-US" sz="2700" spc="-1" strike="noStrike">
-              <a:solidFill>
-                <a:srgbClr val="000000"/>
-              </a:solidFill>
-              <a:latin typeface="Arial"/>
-            </a:endParaRPr>
-          </a:p>
-        </p:txBody>
-      </p:sp>
-      <p:sp>
-        <p:nvSpPr>
-          <p:cNvPr id="86" name="PlaceHolder 2"/>
-          <p:cNvSpPr>
-            <a:spLocks noGrp="1"/>
-          </p:cNvSpPr>
-          <p:nvPr>
-            <p:ph/>
-          </p:nvPr>
-        </p:nvSpPr>
-        <p:spPr>
-          <a:xfrm>
-            <a:off x="540000" y="1350000"/>
-            <a:ext cx="9000000" cy="3600000"/>
-          </a:xfrm>
-          <a:prstGeom prst="rect">
-            <a:avLst/>
-          </a:prstGeom>
-          <a:noFill/>
-          <a:ln w="0">
-            <a:noFill/>
-          </a:ln>
-        </p:spPr>
-        <p:txBody>
-          <a:bodyPr lIns="0" rIns="0" tIns="0" bIns="0" anchor="t">
-            <a:normAutofit/>
-          </a:bodyPr>
-          <a:p>
-            <a:pPr marL="432000" indent="0">
-              <a:spcAft>
-                <a:spcPts val="1057"/>
-              </a:spcAft>
-              <a:buNone/>
-            </a:pPr>
-            <a:r>
-              <a:rPr b="1" lang="en-US" sz="2000" spc="-1" strike="noStrike">
-                <a:solidFill>
-                  <a:srgbClr val="000000"/>
-                </a:solidFill>
-                <a:latin typeface="Arial"/>
-              </a:rPr>
-              <a:t>5.3 Conceptual Design</a:t>
-            </a:r>
-            <a:endParaRPr b="0" lang="en-US" sz="2000" spc="-1" strike="noStrike">
               <a:solidFill>
                 <a:srgbClr val="000000"/>
               </a:solidFill>
@@ -5795,19 +5638,19 @@
       </p:sp>
       <p:pic>
         <p:nvPicPr>
-          <p:cNvPr id="87" name="" descr=""/>
+          <p:cNvPr id="85" name="" descr=""/>
           <p:cNvPicPr/>
           <p:nvPr/>
         </p:nvPicPr>
         <p:blipFill>
           <a:blip r:embed="rId1"/>
-          <a:srcRect l="15602" t="23958" r="16358" b="2276"/>
+          <a:srcRect l="6801" t="26229" r="9286" b="0"/>
           <a:stretch/>
         </p:blipFill>
         <p:spPr>
           <a:xfrm>
-            <a:off x="1371960" y="1600560"/>
-            <a:ext cx="6857640" cy="3885840"/>
+            <a:off x="685800" y="1371600"/>
+            <a:ext cx="8457840" cy="3886200"/>
           </a:xfrm>
           <a:prstGeom prst="rect">
             <a:avLst/>
@@ -5849,7 +5692,7 @@
       </p:grpSpPr>
       <p:sp>
         <p:nvSpPr>
-          <p:cNvPr id="88" name="PlaceHolder 1"/>
+          <p:cNvPr id="86" name="PlaceHolder 1"/>
           <p:cNvSpPr>
             <a:spLocks noGrp="1"/>
           </p:cNvSpPr>
@@ -5885,75 +5728,9 @@
                 </a:solidFill>
                 <a:latin typeface="Arial"/>
               </a:rPr>
-              <a:t>5. LITERATURE</a:t>
+              <a:t>5. LITERATURE: Architectural Design</a:t>
             </a:r>
             <a:endParaRPr b="0" lang="en-US" sz="2700" spc="-1" strike="noStrike">
-              <a:solidFill>
-                <a:srgbClr val="000000"/>
-              </a:solidFill>
-              <a:latin typeface="Arial"/>
-            </a:endParaRPr>
-          </a:p>
-        </p:txBody>
-      </p:sp>
-      <p:sp>
-        <p:nvSpPr>
-          <p:cNvPr id="89" name="PlaceHolder 2"/>
-          <p:cNvSpPr>
-            <a:spLocks noGrp="1"/>
-          </p:cNvSpPr>
-          <p:nvPr>
-            <p:ph/>
-          </p:nvPr>
-        </p:nvSpPr>
-        <p:spPr>
-          <a:xfrm>
-            <a:off x="540000" y="1350000"/>
-            <a:ext cx="9000000" cy="3600000"/>
-          </a:xfrm>
-          <a:prstGeom prst="rect">
-            <a:avLst/>
-          </a:prstGeom>
-          <a:noFill/>
-          <a:ln w="0">
-            <a:noFill/>
-          </a:ln>
-        </p:spPr>
-        <p:txBody>
-          <a:bodyPr lIns="0" rIns="0" tIns="0" bIns="0" anchor="t">
-            <a:normAutofit/>
-          </a:bodyPr>
-          <a:p>
-            <a:pPr marL="432000" indent="0">
-              <a:spcAft>
-                <a:spcPts val="1057"/>
-              </a:spcAft>
-              <a:buNone/>
-            </a:pPr>
-            <a:r>
-              <a:rPr b="1" lang="en-US" sz="2000" spc="-1" strike="noStrike">
-                <a:solidFill>
-                  <a:srgbClr val="000000"/>
-                </a:solidFill>
-                <a:latin typeface="Arial"/>
-              </a:rPr>
-              <a:t>5.3 Conceptual Design</a:t>
-            </a:r>
-            <a:endParaRPr b="0" lang="en-US" sz="2000" spc="-1" strike="noStrike">
-              <a:solidFill>
-                <a:srgbClr val="000000"/>
-              </a:solidFill>
-              <a:latin typeface="Arial"/>
-            </a:endParaRPr>
-          </a:p>
-          <a:p>
-            <a:pPr marL="432000" indent="0">
-              <a:spcAft>
-                <a:spcPts val="1057"/>
-              </a:spcAft>
-              <a:buNone/>
-            </a:pPr>
-            <a:endParaRPr b="0" lang="en-US" sz="2000" spc="-1" strike="noStrike">
               <a:solidFill>
                 <a:srgbClr val="000000"/>
               </a:solidFill>
@@ -5964,19 +5741,18 @@
       </p:sp>
       <p:pic>
         <p:nvPicPr>
-          <p:cNvPr id="90" name="" descr=""/>
+          <p:cNvPr id="87" name="" descr=""/>
           <p:cNvPicPr/>
           <p:nvPr/>
         </p:nvPicPr>
         <p:blipFill>
           <a:blip r:embed="rId1"/>
-          <a:srcRect l="11067" t="26669" r="14092" b="0"/>
           <a:stretch/>
         </p:blipFill>
         <p:spPr>
           <a:xfrm>
-            <a:off x="1143360" y="1623600"/>
-            <a:ext cx="7543440" cy="3862800"/>
+            <a:off x="540000" y="1365120"/>
+            <a:ext cx="9000000" cy="3569760"/>
           </a:xfrm>
           <a:prstGeom prst="rect">
             <a:avLst/>
@@ -6018,7 +5794,7 @@
       </p:grpSpPr>
       <p:sp>
         <p:nvSpPr>
-          <p:cNvPr id="91" name="PlaceHolder 1"/>
+          <p:cNvPr id="88" name="PlaceHolder 1"/>
           <p:cNvSpPr>
             <a:spLocks noGrp="1"/>
           </p:cNvSpPr>
@@ -6054,75 +5830,9 @@
                 </a:solidFill>
                 <a:latin typeface="Arial"/>
               </a:rPr>
-              <a:t>5. LITERATURE</a:t>
+              <a:t>5. LITERATURE: Database Design</a:t>
             </a:r>
             <a:endParaRPr b="0" lang="en-US" sz="2700" spc="-1" strike="noStrike">
-              <a:solidFill>
-                <a:srgbClr val="000000"/>
-              </a:solidFill>
-              <a:latin typeface="Arial"/>
-            </a:endParaRPr>
-          </a:p>
-        </p:txBody>
-      </p:sp>
-      <p:sp>
-        <p:nvSpPr>
-          <p:cNvPr id="92" name="PlaceHolder 2"/>
-          <p:cNvSpPr>
-            <a:spLocks noGrp="1"/>
-          </p:cNvSpPr>
-          <p:nvPr>
-            <p:ph/>
-          </p:nvPr>
-        </p:nvSpPr>
-        <p:spPr>
-          <a:xfrm>
-            <a:off x="540000" y="1350000"/>
-            <a:ext cx="9000000" cy="3600000"/>
-          </a:xfrm>
-          <a:prstGeom prst="rect">
-            <a:avLst/>
-          </a:prstGeom>
-          <a:noFill/>
-          <a:ln w="0">
-            <a:noFill/>
-          </a:ln>
-        </p:spPr>
-        <p:txBody>
-          <a:bodyPr lIns="0" rIns="0" tIns="0" bIns="0" anchor="t">
-            <a:normAutofit/>
-          </a:bodyPr>
-          <a:p>
-            <a:pPr marL="432000" indent="0">
-              <a:spcAft>
-                <a:spcPts val="1057"/>
-              </a:spcAft>
-              <a:buNone/>
-            </a:pPr>
-            <a:r>
-              <a:rPr b="1" lang="en-US" sz="2000" spc="-1" strike="noStrike">
-                <a:solidFill>
-                  <a:srgbClr val="000000"/>
-                </a:solidFill>
-                <a:latin typeface="Arial"/>
-              </a:rPr>
-              <a:t>5.3 Conceptual Design</a:t>
-            </a:r>
-            <a:endParaRPr b="0" lang="en-US" sz="2000" spc="-1" strike="noStrike">
-              <a:solidFill>
-                <a:srgbClr val="000000"/>
-              </a:solidFill>
-              <a:latin typeface="Arial"/>
-            </a:endParaRPr>
-          </a:p>
-          <a:p>
-            <a:pPr marL="432000" indent="0">
-              <a:spcAft>
-                <a:spcPts val="1057"/>
-              </a:spcAft>
-              <a:buNone/>
-            </a:pPr>
-            <a:endParaRPr b="0" lang="en-US" sz="2000" spc="-1" strike="noStrike">
               <a:solidFill>
                 <a:srgbClr val="000000"/>
               </a:solidFill>
@@ -6133,19 +5843,19 @@
       </p:sp>
       <p:pic>
         <p:nvPicPr>
-          <p:cNvPr id="93" name="" descr=""/>
+          <p:cNvPr id="89" name="" descr=""/>
           <p:cNvPicPr/>
           <p:nvPr/>
         </p:nvPicPr>
         <p:blipFill>
           <a:blip r:embed="rId1"/>
-          <a:srcRect l="8705" t="26304" r="11917" b="0"/>
+          <a:srcRect l="4327" t="8988" r="20829" b="4224"/>
           <a:stretch/>
         </p:blipFill>
         <p:spPr>
           <a:xfrm>
-            <a:off x="1143000" y="1788120"/>
-            <a:ext cx="8000640" cy="3881880"/>
+            <a:off x="835920" y="1143000"/>
+            <a:ext cx="7543440" cy="4571640"/>
           </a:xfrm>
           <a:prstGeom prst="rect">
             <a:avLst/>
@@ -6187,7 +5897,7 @@
       </p:grpSpPr>
       <p:sp>
         <p:nvSpPr>
-          <p:cNvPr id="94" name="PlaceHolder 1"/>
+          <p:cNvPr id="90" name="PlaceHolder 1"/>
           <p:cNvSpPr>
             <a:spLocks noGrp="1"/>
           </p:cNvSpPr>
@@ -6236,7 +5946,7 @@
       </p:sp>
       <p:sp>
         <p:nvSpPr>
-          <p:cNvPr id="95" name="PlaceHolder 2"/>
+          <p:cNvPr id="91" name="PlaceHolder 2"/>
           <p:cNvSpPr>
             <a:spLocks noGrp="1"/>
           </p:cNvSpPr>
@@ -6275,69 +5985,26 @@
                 </a:solidFill>
                 <a:latin typeface="Arial"/>
               </a:rPr>
-              <a:t>5.3 Conceptual Design</a:t>
-            </a:r>
-            <a:endParaRPr b="0" lang="en-US" sz="2000" spc="-1" strike="noStrike">
-              <a:solidFill>
-                <a:srgbClr val="000000"/>
-              </a:solidFill>
-              <a:latin typeface="Arial"/>
-            </a:endParaRPr>
-          </a:p>
-          <a:p>
-            <a:pPr marL="432000" indent="0">
-              <a:spcAft>
-                <a:spcPts val="1057"/>
-              </a:spcAft>
-              <a:buNone/>
-            </a:pPr>
-            <a:endParaRPr b="0" lang="en-US" sz="2000" spc="-1" strike="noStrike">
-              <a:solidFill>
-                <a:srgbClr val="000000"/>
-              </a:solidFill>
-              <a:latin typeface="Arial"/>
-            </a:endParaRPr>
-          </a:p>
-          <a:p>
-            <a:pPr marL="432000" indent="0">
-              <a:spcAft>
-                <a:spcPts val="1057"/>
-              </a:spcAft>
-              <a:buNone/>
-            </a:pPr>
-            <a:endParaRPr b="0" lang="en-US" sz="2000" spc="-1" strike="noStrike">
-              <a:solidFill>
-                <a:srgbClr val="000000"/>
-              </a:solidFill>
-              <a:latin typeface="Arial"/>
-            </a:endParaRPr>
-          </a:p>
-        </p:txBody>
-      </p:sp>
-      <p:pic>
-        <p:nvPicPr>
-          <p:cNvPr id="96" name="" descr=""/>
-          <p:cNvPicPr/>
-          <p:nvPr/>
-        </p:nvPicPr>
-        <p:blipFill>
-          <a:blip r:embed="rId1"/>
-          <a:srcRect l="10973" t="22693" r="11917" b="0"/>
-          <a:stretch/>
-        </p:blipFill>
-        <p:spPr>
-          <a:xfrm>
-            <a:off x="1600200" y="1600200"/>
-            <a:ext cx="7772040" cy="4072320"/>
-          </a:xfrm>
-          <a:prstGeom prst="rect">
-            <a:avLst/>
-          </a:prstGeom>
-          <a:ln w="10800">
-            <a:noFill/>
-          </a:ln>
-        </p:spPr>
-      </p:pic>
+              <a:t>5.3.3 Technological Infrastructure: </a:t>
+            </a:r>
+            <a:r>
+              <a:rPr b="0" lang="en-US" sz="2000" spc="-1" strike="noStrike">
+                <a:solidFill>
+                  <a:srgbClr val="000000"/>
+                </a:solidFill>
+                <a:latin typeface="Arial"/>
+              </a:rPr>
+              <a:t>Utilizing a robust technological infrastructure, the design specifies the use of HTML, CSS, Javascript, Python, and the Django Web Framework. This technology stack not only ensures the security of the portal but also provides a scalable foundation for future enhancements and increased user load.</a:t>
+            </a:r>
+            <a:endParaRPr b="0" lang="en-US" sz="2000" spc="-1" strike="noStrike">
+              <a:solidFill>
+                <a:srgbClr val="000000"/>
+              </a:solidFill>
+              <a:latin typeface="Arial"/>
+            </a:endParaRPr>
+          </a:p>
+        </p:txBody>
+      </p:sp>
     </p:spTree>
   </p:cSld>
   <mc:AlternateContent>
@@ -6370,7 +6037,7 @@
       </p:grpSpPr>
       <p:sp>
         <p:nvSpPr>
-          <p:cNvPr id="97" name="PlaceHolder 1"/>
+          <p:cNvPr id="92" name="PlaceHolder 1"/>
           <p:cNvSpPr>
             <a:spLocks noGrp="1"/>
           </p:cNvSpPr>
@@ -6406,7 +6073,7 @@
                 </a:solidFill>
                 <a:latin typeface="Arial"/>
               </a:rPr>
-              <a:t>5. LITERATURE</a:t>
+              <a:t>6. METHODOLOGY</a:t>
             </a:r>
             <a:endParaRPr b="0" lang="en-US" sz="2700" spc="-1" strike="noStrike">
               <a:solidFill>
@@ -6419,7 +6086,7 @@
       </p:sp>
       <p:sp>
         <p:nvSpPr>
-          <p:cNvPr id="98" name="PlaceHolder 2"/>
+          <p:cNvPr id="93" name="PlaceHolder 2"/>
           <p:cNvSpPr>
             <a:spLocks noGrp="1"/>
           </p:cNvSpPr>
@@ -6442,10 +6109,10 @@
         </p:spPr>
         <p:txBody>
           <a:bodyPr lIns="0" rIns="0" tIns="0" bIns="0" anchor="t">
-            <a:normAutofit/>
-          </a:bodyPr>
-          <a:p>
-            <a:pPr marL="432000" indent="0">
+            <a:normAutofit fontScale="63000"/>
+          </a:bodyPr>
+          <a:p>
+            <a:pPr marL="272160" indent="0">
               <a:spcAft>
                 <a:spcPts val="1057"/>
               </a:spcAft>
@@ -6458,17 +6125,17 @@
                 </a:solidFill>
                 <a:latin typeface="Arial"/>
               </a:rPr>
-              <a:t>5.3 Conceptual Design</a:t>
-            </a:r>
-            <a:endParaRPr b="0" lang="en-US" sz="2000" spc="-1" strike="noStrike">
-              <a:solidFill>
-                <a:srgbClr val="000000"/>
-              </a:solidFill>
-              <a:latin typeface="Arial"/>
-            </a:endParaRPr>
-          </a:p>
-          <a:p>
-            <a:pPr marL="432000" indent="0">
+              <a:t>6.1 Model</a:t>
+            </a:r>
+            <a:endParaRPr b="0" lang="en-US" sz="2000" spc="-1" strike="noStrike">
+              <a:solidFill>
+                <a:srgbClr val="000000"/>
+              </a:solidFill>
+              <a:latin typeface="Arial"/>
+            </a:endParaRPr>
+          </a:p>
+          <a:p>
+            <a:pPr marL="272160" indent="0">
               <a:spcAft>
                 <a:spcPts val="1057"/>
               </a:spcAft>
@@ -6481,8 +6148,11 @@
                 </a:solidFill>
                 <a:latin typeface="Arial"/>
               </a:rPr>
-              <a:t>Technological Infrastructure: </a:t>
-            </a:r>
+              <a:t>Iterative and Incremental Development Model:</a:t>
+            </a:r>
+            <a:br>
+              <a:rPr sz="2000"/>
+            </a:br>
             <a:r>
               <a:rPr b="0" lang="en-US" sz="2000" spc="-1" strike="noStrike">
                 <a:solidFill>
@@ -6490,7 +6160,228 @@
                 </a:solidFill>
                 <a:latin typeface="Arial"/>
               </a:rPr>
-              <a:t>Utilizing a robust technological infrastructure, the design specifies the use of HTML, CSS, Javascript, Python, and the Django Web Framework. This technology stack not only ensures the security of the portal but also provides a scalable foundation for future enhancements and increased user load.</a:t>
+              <a:t>The methodology will be implemented in the following stages:</a:t>
+            </a:r>
+            <a:endParaRPr b="0" lang="en-US" sz="2000" spc="-1" strike="noStrike">
+              <a:solidFill>
+                <a:srgbClr val="000000"/>
+              </a:solidFill>
+              <a:latin typeface="Arial"/>
+            </a:endParaRPr>
+          </a:p>
+          <a:p>
+            <a:pPr marL="272160" indent="-204120">
+              <a:spcAft>
+                <a:spcPts val="1057"/>
+              </a:spcAft>
+              <a:buClr>
+                <a:srgbClr val="91d93f"/>
+              </a:buClr>
+              <a:buSzPct val="45000"/>
+              <a:buFont typeface="Wingdings" charset="2"/>
+              <a:buChar char=""/>
+            </a:pPr>
+            <a:r>
+              <a:rPr b="1" lang="en-US" sz="2000" spc="-1" strike="noStrike">
+                <a:solidFill>
+                  <a:srgbClr val="000000"/>
+                </a:solidFill>
+                <a:latin typeface="Arial"/>
+              </a:rPr>
+              <a:t>Requirements Analysis</a:t>
+            </a:r>
+            <a:r>
+              <a:rPr b="0" lang="en-US" sz="2000" spc="-1" strike="noStrike">
+                <a:solidFill>
+                  <a:srgbClr val="000000"/>
+                </a:solidFill>
+                <a:latin typeface="Arial"/>
+              </a:rPr>
+              <a:t>: Conduct a comprehensive analysis of the requirements gathered from stakeholders and the conceptual design phase.</a:t>
+            </a:r>
+            <a:endParaRPr b="0" lang="en-US" sz="2000" spc="-1" strike="noStrike">
+              <a:solidFill>
+                <a:srgbClr val="000000"/>
+              </a:solidFill>
+              <a:latin typeface="Arial"/>
+            </a:endParaRPr>
+          </a:p>
+          <a:p>
+            <a:pPr marL="272160" indent="-204120">
+              <a:spcAft>
+                <a:spcPts val="1057"/>
+              </a:spcAft>
+              <a:buClr>
+                <a:srgbClr val="91d93f"/>
+              </a:buClr>
+              <a:buSzPct val="45000"/>
+              <a:buFont typeface="Wingdings" charset="2"/>
+              <a:buChar char=""/>
+            </a:pPr>
+            <a:r>
+              <a:rPr b="1" lang="en-US" sz="2000" spc="-1" strike="noStrike">
+                <a:solidFill>
+                  <a:srgbClr val="000000"/>
+                </a:solidFill>
+                <a:latin typeface="Arial"/>
+              </a:rPr>
+              <a:t>System Design</a:t>
+            </a:r>
+            <a:r>
+              <a:rPr b="0" lang="en-US" sz="2000" spc="-1" strike="noStrike">
+                <a:solidFill>
+                  <a:srgbClr val="000000"/>
+                </a:solidFill>
+                <a:latin typeface="Arial"/>
+              </a:rPr>
+              <a:t>: Develop a detailed system design based on the conceptual design, outlining the architecture, components, and data structures.</a:t>
+            </a:r>
+            <a:br>
+              <a:rPr sz="2000"/>
+            </a:br>
+            <a:r>
+              <a:rPr b="0" lang="en-US" sz="2000" spc="-1" strike="noStrike">
+                <a:solidFill>
+                  <a:srgbClr val="000000"/>
+                </a:solidFill>
+                <a:latin typeface="Arial"/>
+              </a:rPr>
+              <a:t>Identify the necessary technologies and tools for the implementation phase.</a:t>
+            </a:r>
+            <a:endParaRPr b="0" lang="en-US" sz="2000" spc="-1" strike="noStrike">
+              <a:solidFill>
+                <a:srgbClr val="000000"/>
+              </a:solidFill>
+              <a:latin typeface="Arial"/>
+            </a:endParaRPr>
+          </a:p>
+          <a:p>
+            <a:pPr marL="272160" indent="-204120">
+              <a:spcAft>
+                <a:spcPts val="1057"/>
+              </a:spcAft>
+              <a:buClr>
+                <a:srgbClr val="91d93f"/>
+              </a:buClr>
+              <a:buSzPct val="45000"/>
+              <a:buFont typeface="Wingdings" charset="2"/>
+              <a:buChar char=""/>
+            </a:pPr>
+            <a:r>
+              <a:rPr b="1" lang="en-US" sz="2000" spc="-1" strike="noStrike">
+                <a:solidFill>
+                  <a:srgbClr val="000000"/>
+                </a:solidFill>
+                <a:latin typeface="Arial"/>
+              </a:rPr>
+              <a:t>Implementation (Coding)</a:t>
+            </a:r>
+            <a:r>
+              <a:rPr b="0" lang="en-US" sz="2000" spc="-1" strike="noStrike">
+                <a:solidFill>
+                  <a:srgbClr val="000000"/>
+                </a:solidFill>
+                <a:latin typeface="Arial"/>
+              </a:rPr>
+              <a:t>: Begin the coding phase, implementing the functionalities and features outlined in the conceptual design.</a:t>
+            </a:r>
+            <a:br>
+              <a:rPr sz="2000"/>
+            </a:br>
+            <a:r>
+              <a:rPr b="0" lang="en-US" sz="2000" spc="-1" strike="noStrike">
+                <a:solidFill>
+                  <a:srgbClr val="000000"/>
+                </a:solidFill>
+                <a:latin typeface="Arial"/>
+              </a:rPr>
+              <a:t> Utilize the chosen technology stack, including HTML, CSS, Javascript, Python, and the Django Web Framework, to build the web application.</a:t>
+            </a:r>
+            <a:endParaRPr b="0" lang="en-US" sz="2000" spc="-1" strike="noStrike">
+              <a:solidFill>
+                <a:srgbClr val="000000"/>
+              </a:solidFill>
+              <a:latin typeface="Arial"/>
+            </a:endParaRPr>
+          </a:p>
+          <a:p>
+            <a:pPr marL="272160" indent="-204120">
+              <a:spcAft>
+                <a:spcPts val="1057"/>
+              </a:spcAft>
+              <a:buClr>
+                <a:srgbClr val="91d93f"/>
+              </a:buClr>
+              <a:buSzPct val="45000"/>
+              <a:buFont typeface="Wingdings" charset="2"/>
+              <a:buChar char=""/>
+            </a:pPr>
+            <a:r>
+              <a:rPr b="1" lang="en-US" sz="2000" spc="-1" strike="noStrike">
+                <a:solidFill>
+                  <a:srgbClr val="000000"/>
+                </a:solidFill>
+                <a:latin typeface="Arial"/>
+              </a:rPr>
+              <a:t>Testing: </a:t>
+            </a:r>
+            <a:r>
+              <a:rPr b="0" lang="en-US" sz="2000" spc="-1" strike="noStrike">
+                <a:solidFill>
+                  <a:srgbClr val="000000"/>
+                </a:solidFill>
+                <a:latin typeface="Arial"/>
+              </a:rPr>
+              <a:t>Conduct thorough testing at each iteration to ensure that individual components and features meet specified requirements.</a:t>
+            </a:r>
+            <a:br>
+              <a:rPr sz="2000"/>
+            </a:br>
+            <a:r>
+              <a:rPr b="0" lang="en-US" sz="2000" spc="-1" strike="noStrike">
+                <a:solidFill>
+                  <a:srgbClr val="000000"/>
+                </a:solidFill>
+                <a:latin typeface="Arial"/>
+              </a:rPr>
+              <a:t>Address any issues or bugs identified during testing promptly.</a:t>
+            </a:r>
+            <a:endParaRPr b="0" lang="en-US" sz="2000" spc="-1" strike="noStrike">
+              <a:solidFill>
+                <a:srgbClr val="000000"/>
+              </a:solidFill>
+              <a:latin typeface="Arial"/>
+            </a:endParaRPr>
+          </a:p>
+          <a:p>
+            <a:pPr marL="272160" indent="-204120">
+              <a:spcAft>
+                <a:spcPts val="1057"/>
+              </a:spcAft>
+              <a:buClr>
+                <a:srgbClr val="91d93f"/>
+              </a:buClr>
+              <a:buSzPct val="45000"/>
+              <a:buFont typeface="Wingdings" charset="2"/>
+              <a:buChar char=""/>
+            </a:pPr>
+            <a:r>
+              <a:rPr b="1" lang="en-US" sz="2000" spc="-1" strike="noStrike">
+                <a:solidFill>
+                  <a:srgbClr val="000000"/>
+                </a:solidFill>
+                <a:latin typeface="Arial"/>
+              </a:rPr>
+              <a:t>Deployment</a:t>
+            </a:r>
+            <a:r>
+              <a:rPr b="0" lang="en-US" sz="2000" spc="-1" strike="noStrike">
+                <a:solidFill>
+                  <a:srgbClr val="000000"/>
+                </a:solidFill>
+                <a:latin typeface="Arial"/>
+              </a:rPr>
+              <a:t>: Deploy the system to a live environment, making it accessible to users for real-world application and testing.</a:t>
             </a:r>
             <a:endParaRPr b="0" lang="en-US" sz="2000" spc="-1" strike="noStrike">
               <a:solidFill>
@@ -6533,7 +6424,7 @@
       </p:grpSpPr>
       <p:sp>
         <p:nvSpPr>
-          <p:cNvPr id="99" name="PlaceHolder 1"/>
+          <p:cNvPr id="94" name="PlaceHolder 1"/>
           <p:cNvSpPr>
             <a:spLocks noGrp="1"/>
           </p:cNvSpPr>
@@ -6582,7 +6473,7 @@
       </p:sp>
       <p:sp>
         <p:nvSpPr>
-          <p:cNvPr id="100" name="PlaceHolder 2"/>
+          <p:cNvPr id="95" name="PlaceHolder 2"/>
           <p:cNvSpPr>
             <a:spLocks noGrp="1"/>
           </p:cNvSpPr>
@@ -6605,10 +6496,10 @@
         </p:spPr>
         <p:txBody>
           <a:bodyPr lIns="0" rIns="0" tIns="0" bIns="0" anchor="t">
-            <a:normAutofit fontScale="63000"/>
-          </a:bodyPr>
-          <a:p>
-            <a:pPr marL="272160" indent="0">
+            <a:normAutofit fontScale="97000"/>
+          </a:bodyPr>
+          <a:p>
+            <a:pPr marL="419040" indent="0">
               <a:spcAft>
                 <a:spcPts val="1057"/>
               </a:spcAft>
@@ -6621,17 +6512,17 @@
                 </a:solidFill>
                 <a:latin typeface="Arial"/>
               </a:rPr>
-              <a:t>6.1 Model</a:t>
-            </a:r>
-            <a:endParaRPr b="0" lang="en-US" sz="2000" spc="-1" strike="noStrike">
-              <a:solidFill>
-                <a:srgbClr val="000000"/>
-              </a:solidFill>
-              <a:latin typeface="Arial"/>
-            </a:endParaRPr>
-          </a:p>
-          <a:p>
-            <a:pPr marL="272160" indent="0">
+              <a:t>6.2 System Requirements</a:t>
+            </a:r>
+            <a:endParaRPr b="0" lang="en-US" sz="2000" spc="-1" strike="noStrike">
+              <a:solidFill>
+                <a:srgbClr val="000000"/>
+              </a:solidFill>
+              <a:latin typeface="Arial"/>
+            </a:endParaRPr>
+          </a:p>
+          <a:p>
+            <a:pPr marL="419040" indent="0">
               <a:spcAft>
                 <a:spcPts val="1057"/>
               </a:spcAft>
@@ -6644,29 +6535,17 @@
                 </a:solidFill>
                 <a:latin typeface="Arial"/>
               </a:rPr>
-              <a:t>Iterative and Incremental Development Model:</a:t>
-            </a:r>
-            <a:br>
-              <a:rPr sz="2000"/>
-            </a:br>
-            <a:r>
-              <a:rPr b="0" lang="en-US" sz="2000" spc="-1" strike="noStrike">
-                <a:solidFill>
-                  <a:srgbClr val="000000"/>
-                </a:solidFill>
-                <a:latin typeface="Arial"/>
-              </a:rPr>
-              <a:t>The methodology will be implemented in the following stages:</a:t>
-            </a:r>
-            <a:endParaRPr b="0" lang="en-US" sz="2000" spc="-1" strike="noStrike">
-              <a:solidFill>
-                <a:srgbClr val="000000"/>
-              </a:solidFill>
-              <a:latin typeface="Arial"/>
-            </a:endParaRPr>
-          </a:p>
-          <a:p>
-            <a:pPr marL="272160" indent="-204120">
+              <a:t>6.2.1 Functional Requirements</a:t>
+            </a:r>
+            <a:endParaRPr b="0" lang="en-US" sz="2000" spc="-1" strike="noStrike">
+              <a:solidFill>
+                <a:srgbClr val="000000"/>
+              </a:solidFill>
+              <a:latin typeface="Arial"/>
+            </a:endParaRPr>
+          </a:p>
+          <a:p>
+            <a:pPr marL="419040" indent="-314280">
               <a:spcAft>
                 <a:spcPts val="1057"/>
               </a:spcAft>
@@ -6678,32 +6557,32 @@
               <a:buChar char=""/>
             </a:pPr>
             <a:r>
-              <a:rPr b="1" lang="en-US" sz="2000" spc="-1" strike="noStrike">
-                <a:solidFill>
-                  <a:srgbClr val="000000"/>
-                </a:solidFill>
-                <a:latin typeface="Arial"/>
-              </a:rPr>
-              <a:t>Requirements Analysis</a:t>
-            </a:r>
-            <a:r>
-              <a:rPr b="0" lang="en-US" sz="2000" spc="-1" strike="noStrike">
-                <a:solidFill>
-                  <a:srgbClr val="000000"/>
-                </a:solidFill>
-                <a:latin typeface="Arial"/>
-              </a:rPr>
-              <a:t>: Conduct a comprehensive analysis of the requirements gathered from stakeholders and the conceptual design phase.</a:t>
-            </a:r>
-            <a:endParaRPr b="0" lang="en-US" sz="2000" spc="-1" strike="noStrike">
-              <a:solidFill>
-                <a:srgbClr val="000000"/>
-              </a:solidFill>
-              <a:latin typeface="Arial"/>
-            </a:endParaRPr>
-          </a:p>
-          <a:p>
-            <a:pPr marL="272160" indent="-204120">
+              <a:rPr b="1" lang="en-US" sz="1400" spc="-1" strike="noStrike">
+                <a:solidFill>
+                  <a:srgbClr val="000000"/>
+                </a:solidFill>
+                <a:latin typeface="Arial"/>
+              </a:rPr>
+              <a:t>REQ -1: </a:t>
+            </a:r>
+            <a:r>
+              <a:rPr b="0" lang="en-US" sz="1400" spc="-1" strike="noStrike">
+                <a:solidFill>
+                  <a:srgbClr val="000000"/>
+                </a:solidFill>
+                <a:latin typeface="Arial"/>
+              </a:rPr>
+              <a:t>The portal shall ensure that the applicant can only apply once in every financial year.</a:t>
+            </a:r>
+            <a:endParaRPr b="0" lang="en-US" sz="1400" spc="-1" strike="noStrike">
+              <a:solidFill>
+                <a:srgbClr val="000000"/>
+              </a:solidFill>
+              <a:latin typeface="Arial"/>
+            </a:endParaRPr>
+          </a:p>
+          <a:p>
+            <a:pPr marL="419040" indent="-314280">
               <a:spcAft>
                 <a:spcPts val="1057"/>
               </a:spcAft>
@@ -6715,44 +6594,32 @@
               <a:buChar char=""/>
             </a:pPr>
             <a:r>
-              <a:rPr b="1" lang="en-US" sz="2000" spc="-1" strike="noStrike">
-                <a:solidFill>
-                  <a:srgbClr val="000000"/>
-                </a:solidFill>
-                <a:latin typeface="Arial"/>
-              </a:rPr>
-              <a:t>System Design</a:t>
-            </a:r>
-            <a:r>
-              <a:rPr b="0" lang="en-US" sz="2000" spc="-1" strike="noStrike">
-                <a:solidFill>
-                  <a:srgbClr val="000000"/>
-                </a:solidFill>
-                <a:latin typeface="Arial"/>
-              </a:rPr>
-              <a:t>: Develop a detailed system design based on the conceptual design, outlining the architecture, components, and data structures.</a:t>
-            </a:r>
-            <a:br>
-              <a:rPr sz="2000"/>
-            </a:br>
-            <a:r>
-              <a:rPr b="0" lang="en-US" sz="2000" spc="-1" strike="noStrike">
-                <a:solidFill>
-                  <a:srgbClr val="000000"/>
-                </a:solidFill>
-                <a:latin typeface="Arial"/>
-              </a:rPr>
-              <a:t>Identify the necessary technologies and tools for the implementation phase.</a:t>
-            </a:r>
-            <a:endParaRPr b="0" lang="en-US" sz="2000" spc="-1" strike="noStrike">
-              <a:solidFill>
-                <a:srgbClr val="000000"/>
-              </a:solidFill>
-              <a:latin typeface="Arial"/>
-            </a:endParaRPr>
-          </a:p>
-          <a:p>
-            <a:pPr marL="272160" indent="-204120">
+              <a:rPr b="1" lang="en-US" sz="1400" spc="-1" strike="noStrike">
+                <a:solidFill>
+                  <a:srgbClr val="000000"/>
+                </a:solidFill>
+                <a:latin typeface="Arial"/>
+              </a:rPr>
+              <a:t>REQ-2: </a:t>
+            </a:r>
+            <a:r>
+              <a:rPr b="0" lang="en-US" sz="1400" spc="-1" strike="noStrike">
+                <a:solidFill>
+                  <a:srgbClr val="000000"/>
+                </a:solidFill>
+                <a:latin typeface="Arial"/>
+              </a:rPr>
+              <a:t>The portal shall ensure that the national id number provided by the applicant belongs to that particular applicant based on the applicant’s registration number.</a:t>
+            </a:r>
+            <a:endParaRPr b="0" lang="en-US" sz="1400" spc="-1" strike="noStrike">
+              <a:solidFill>
+                <a:srgbClr val="000000"/>
+              </a:solidFill>
+              <a:latin typeface="Arial"/>
+            </a:endParaRPr>
+          </a:p>
+          <a:p>
+            <a:pPr marL="419040" indent="-314280">
               <a:spcAft>
                 <a:spcPts val="1057"/>
               </a:spcAft>
@@ -6764,44 +6631,32 @@
               <a:buChar char=""/>
             </a:pPr>
             <a:r>
-              <a:rPr b="1" lang="en-US" sz="2000" spc="-1" strike="noStrike">
-                <a:solidFill>
-                  <a:srgbClr val="000000"/>
-                </a:solidFill>
-                <a:latin typeface="Arial"/>
-              </a:rPr>
-              <a:t>Implementation (Coding)</a:t>
-            </a:r>
-            <a:r>
-              <a:rPr b="0" lang="en-US" sz="2000" spc="-1" strike="noStrike">
-                <a:solidFill>
-                  <a:srgbClr val="000000"/>
-                </a:solidFill>
-                <a:latin typeface="Arial"/>
-              </a:rPr>
-              <a:t>: Begin the coding phase, implementing the functionalities and features outlined in the conceptual design.</a:t>
-            </a:r>
-            <a:br>
-              <a:rPr sz="2000"/>
-            </a:br>
-            <a:r>
-              <a:rPr b="0" lang="en-US" sz="2000" spc="-1" strike="noStrike">
-                <a:solidFill>
-                  <a:srgbClr val="000000"/>
-                </a:solidFill>
-                <a:latin typeface="Arial"/>
-              </a:rPr>
-              <a:t> Utilize the chosen technology stack, including HTML, CSS, Javascript, Python, and the Django Web Framework, to build the web application.</a:t>
-            </a:r>
-            <a:endParaRPr b="0" lang="en-US" sz="2000" spc="-1" strike="noStrike">
-              <a:solidFill>
-                <a:srgbClr val="000000"/>
-              </a:solidFill>
-              <a:latin typeface="Arial"/>
-            </a:endParaRPr>
-          </a:p>
-          <a:p>
-            <a:pPr marL="272160" indent="-204120">
+              <a:rPr b="1" lang="en-US" sz="1400" spc="-1" strike="noStrike">
+                <a:solidFill>
+                  <a:srgbClr val="000000"/>
+                </a:solidFill>
+                <a:latin typeface="Arial"/>
+              </a:rPr>
+              <a:t>REQ-3: </a:t>
+            </a:r>
+            <a:r>
+              <a:rPr b="0" lang="en-US" sz="1400" spc="-1" strike="noStrike">
+                <a:solidFill>
+                  <a:srgbClr val="000000"/>
+                </a:solidFill>
+                <a:latin typeface="Arial"/>
+              </a:rPr>
+              <a:t>The portal shall ensure that the registration number provided by the applicant is actually a valid registration number based on the provided student register of the chosen institution.</a:t>
+            </a:r>
+            <a:endParaRPr b="0" lang="en-US" sz="1400" spc="-1" strike="noStrike">
+              <a:solidFill>
+                <a:srgbClr val="000000"/>
+              </a:solidFill>
+              <a:latin typeface="Arial"/>
+            </a:endParaRPr>
+          </a:p>
+          <a:p>
+            <a:pPr marL="419040" indent="-314280">
               <a:spcAft>
                 <a:spcPts val="1057"/>
               </a:spcAft>
@@ -6813,44 +6668,32 @@
               <a:buChar char=""/>
             </a:pPr>
             <a:r>
-              <a:rPr b="1" lang="en-US" sz="2000" spc="-1" strike="noStrike">
-                <a:solidFill>
-                  <a:srgbClr val="000000"/>
-                </a:solidFill>
-                <a:latin typeface="Arial"/>
-              </a:rPr>
-              <a:t>Testing: </a:t>
-            </a:r>
-            <a:r>
-              <a:rPr b="0" lang="en-US" sz="2000" spc="-1" strike="noStrike">
-                <a:solidFill>
-                  <a:srgbClr val="000000"/>
-                </a:solidFill>
-                <a:latin typeface="Arial"/>
-              </a:rPr>
-              <a:t>Conduct thorough testing at each iteration to ensure that individual components and features meet specified requirements.</a:t>
-            </a:r>
-            <a:br>
-              <a:rPr sz="2000"/>
-            </a:br>
-            <a:r>
-              <a:rPr b="0" lang="en-US" sz="2000" spc="-1" strike="noStrike">
-                <a:solidFill>
-                  <a:srgbClr val="000000"/>
-                </a:solidFill>
-                <a:latin typeface="Arial"/>
-              </a:rPr>
-              <a:t>Address any issues or bugs identified during testing promptly.</a:t>
-            </a:r>
-            <a:endParaRPr b="0" lang="en-US" sz="2000" spc="-1" strike="noStrike">
-              <a:solidFill>
-                <a:srgbClr val="000000"/>
-              </a:solidFill>
-              <a:latin typeface="Arial"/>
-            </a:endParaRPr>
-          </a:p>
-          <a:p>
-            <a:pPr marL="272160" indent="-204120">
+              <a:rPr b="1" lang="en-US" sz="1400" spc="-1" strike="noStrike">
+                <a:solidFill>
+                  <a:srgbClr val="000000"/>
+                </a:solidFill>
+                <a:latin typeface="Arial"/>
+              </a:rPr>
+              <a:t>REQ-4: </a:t>
+            </a:r>
+            <a:r>
+              <a:rPr b="0" lang="en-US" sz="1400" spc="-1" strike="noStrike">
+                <a:solidFill>
+                  <a:srgbClr val="000000"/>
+                </a:solidFill>
+                <a:latin typeface="Arial"/>
+              </a:rPr>
+              <a:t>The portal shall ensure that the applicant is indeed a voter in the chosen constituency based on the provided voter register of the chosen constituency.</a:t>
+            </a:r>
+            <a:endParaRPr b="0" lang="en-US" sz="1400" spc="-1" strike="noStrike">
+              <a:solidFill>
+                <a:srgbClr val="000000"/>
+              </a:solidFill>
+              <a:latin typeface="Arial"/>
+            </a:endParaRPr>
+          </a:p>
+          <a:p>
+            <a:pPr marL="419040" indent="-314280">
               <a:spcAft>
                 <a:spcPts val="1057"/>
               </a:spcAft>
@@ -6862,24 +6705,61 @@
               <a:buChar char=""/>
             </a:pPr>
             <a:r>
-              <a:rPr b="1" lang="en-US" sz="2000" spc="-1" strike="noStrike">
-                <a:solidFill>
-                  <a:srgbClr val="000000"/>
-                </a:solidFill>
-                <a:latin typeface="Arial"/>
-              </a:rPr>
-              <a:t>Deployment</a:t>
-            </a:r>
-            <a:r>
-              <a:rPr b="0" lang="en-US" sz="2000" spc="-1" strike="noStrike">
-                <a:solidFill>
-                  <a:srgbClr val="000000"/>
-                </a:solidFill>
-                <a:latin typeface="Arial"/>
-              </a:rPr>
-              <a:t>: Deploy the system to a live environment, making it accessible to users for real-world application and testing.</a:t>
-            </a:r>
-            <a:endParaRPr b="0" lang="en-US" sz="2000" spc="-1" strike="noStrike">
+              <a:rPr b="1" lang="en-US" sz="1400" spc="-1" strike="noStrike">
+                <a:solidFill>
+                  <a:srgbClr val="000000"/>
+                </a:solidFill>
+                <a:latin typeface="Arial"/>
+              </a:rPr>
+              <a:t>REQ-5: </a:t>
+            </a:r>
+            <a:r>
+              <a:rPr b="0" lang="en-US" sz="1400" spc="-1" strike="noStrike">
+                <a:solidFill>
+                  <a:srgbClr val="000000"/>
+                </a:solidFill>
+                <a:latin typeface="Arial"/>
+              </a:rPr>
+              <a:t>The portal shall ensure that the provided account number is indeed a valid account number of the chosen institution.</a:t>
+            </a:r>
+            <a:endParaRPr b="0" lang="en-US" sz="1400" spc="-1" strike="noStrike">
+              <a:solidFill>
+                <a:srgbClr val="000000"/>
+              </a:solidFill>
+              <a:latin typeface="Arial"/>
+            </a:endParaRPr>
+          </a:p>
+          <a:p>
+            <a:pPr marL="419040" indent="-314280">
+              <a:spcAft>
+                <a:spcPts val="1057"/>
+              </a:spcAft>
+              <a:buClr>
+                <a:srgbClr val="91d93f"/>
+              </a:buClr>
+              <a:buSzPct val="45000"/>
+              <a:buFont typeface="Wingdings" charset="2"/>
+              <a:buChar char=""/>
+            </a:pPr>
+            <a:r>
+              <a:rPr b="1" lang="en-US" sz="1400" spc="-1" strike="noStrike">
+                <a:solidFill>
+                  <a:srgbClr val="000000"/>
+                </a:solidFill>
+                <a:latin typeface="Arial"/>
+              </a:rPr>
+              <a:t>REQ-6: </a:t>
+            </a:r>
+            <a:r>
+              <a:rPr b="0" lang="en-US" sz="1400" spc="-1" strike="noStrike">
+                <a:solidFill>
+                  <a:srgbClr val="000000"/>
+                </a:solidFill>
+                <a:latin typeface="Arial"/>
+              </a:rPr>
+              <a:t>The portal shall ensure that the provided serial number is a valid serial number for the bursary application report to be generated.</a:t>
+            </a:r>
+            <a:endParaRPr b="0" lang="en-US" sz="1400" spc="-1" strike="noStrike">
               <a:solidFill>
                 <a:srgbClr val="000000"/>
               </a:solidFill>
@@ -6920,7 +6800,7 @@
       </p:grpSpPr>
       <p:sp>
         <p:nvSpPr>
-          <p:cNvPr id="101" name="PlaceHolder 1"/>
+          <p:cNvPr id="96" name="PlaceHolder 1"/>
           <p:cNvSpPr>
             <a:spLocks noGrp="1"/>
           </p:cNvSpPr>
@@ -6969,7 +6849,7 @@
       </p:sp>
       <p:sp>
         <p:nvSpPr>
-          <p:cNvPr id="102" name="PlaceHolder 2"/>
+          <p:cNvPr id="97" name="PlaceHolder 2"/>
           <p:cNvSpPr>
             <a:spLocks noGrp="1"/>
           </p:cNvSpPr>
@@ -6992,56 +6872,56 @@
         </p:spPr>
         <p:txBody>
           <a:bodyPr lIns="0" rIns="0" tIns="0" bIns="0" anchor="t">
-            <a:normAutofit fontScale="71000"/>
-          </a:bodyPr>
-          <a:p>
-            <a:pPr marL="306720" indent="0">
-              <a:spcAft>
-                <a:spcPts val="1057"/>
-              </a:spcAft>
-              <a:buNone/>
-            </a:pPr>
-            <a:r>
-              <a:rPr b="1" lang="en-US" sz="2000" spc="-1" strike="noStrike">
-                <a:solidFill>
-                  <a:srgbClr val="000000"/>
-                </a:solidFill>
-                <a:latin typeface="Arial"/>
-              </a:rPr>
-              <a:t>6.2 System Requirements</a:t>
-            </a:r>
-            <a:endParaRPr b="0" lang="en-US" sz="2000" spc="-1" strike="noStrike">
-              <a:solidFill>
-                <a:srgbClr val="000000"/>
-              </a:solidFill>
-              <a:latin typeface="Arial"/>
-            </a:endParaRPr>
-          </a:p>
-          <a:p>
-            <a:pPr marL="306720" indent="0">
-              <a:spcAft>
-                <a:spcPts val="1057"/>
-              </a:spcAft>
-              <a:buNone/>
-            </a:pPr>
-            <a:r>
-              <a:rPr b="1" lang="en-US" sz="2000" spc="-1" strike="noStrike">
-                <a:solidFill>
-                  <a:srgbClr val="000000"/>
-                </a:solidFill>
-                <a:latin typeface="Arial"/>
-              </a:rPr>
-              <a:t>6.2.1 Functional Requirements</a:t>
-            </a:r>
-            <a:endParaRPr b="0" lang="en-US" sz="2000" spc="-1" strike="noStrike">
-              <a:solidFill>
-                <a:srgbClr val="000000"/>
-              </a:solidFill>
-              <a:latin typeface="Arial"/>
-            </a:endParaRPr>
-          </a:p>
-          <a:p>
-            <a:pPr marL="306720" indent="-230040">
+            <a:normAutofit/>
+          </a:bodyPr>
+          <a:p>
+            <a:pPr marL="432000" indent="0">
+              <a:spcAft>
+                <a:spcPts val="1057"/>
+              </a:spcAft>
+              <a:buNone/>
+            </a:pPr>
+            <a:r>
+              <a:rPr b="1" lang="en-US" sz="1600" spc="-1" strike="noStrike">
+                <a:solidFill>
+                  <a:srgbClr val="000000"/>
+                </a:solidFill>
+                <a:latin typeface="Arial"/>
+              </a:rPr>
+              <a:t>6.2.2 Non-Functional Requirements</a:t>
+            </a:r>
+            <a:endParaRPr b="0" lang="en-US" sz="1600" spc="-1" strike="noStrike">
+              <a:solidFill>
+                <a:srgbClr val="000000"/>
+              </a:solidFill>
+              <a:latin typeface="Arial"/>
+            </a:endParaRPr>
+          </a:p>
+          <a:p>
+            <a:pPr marL="432000" indent="0">
+              <a:spcAft>
+                <a:spcPts val="1057"/>
+              </a:spcAft>
+              <a:buNone/>
+            </a:pPr>
+            <a:r>
+              <a:rPr b="1" lang="en-US" sz="1600" spc="-1" strike="noStrike">
+                <a:solidFill>
+                  <a:srgbClr val="000000"/>
+                </a:solidFill>
+                <a:latin typeface="Arial"/>
+              </a:rPr>
+              <a:t>6.2.2.1 Performance Requirements</a:t>
+            </a:r>
+            <a:endParaRPr b="0" lang="en-US" sz="1600" spc="-1" strike="noStrike">
+              <a:solidFill>
+                <a:srgbClr val="000000"/>
+              </a:solidFill>
+              <a:latin typeface="Arial"/>
+            </a:endParaRPr>
+          </a:p>
+          <a:p>
+            <a:pPr marL="432000" indent="-324000">
               <a:spcAft>
                 <a:spcPts val="1057"/>
               </a:spcAft>
@@ -7053,32 +6933,32 @@
               <a:buChar char=""/>
             </a:pPr>
             <a:r>
-              <a:rPr b="1" lang="en-US" sz="2000" spc="-1" strike="noStrike">
-                <a:solidFill>
-                  <a:srgbClr val="000000"/>
-                </a:solidFill>
-                <a:latin typeface="Arial"/>
-              </a:rPr>
-              <a:t>Application Status Tracking: </a:t>
-            </a:r>
-            <a:r>
-              <a:rPr b="0" lang="en-US" sz="2000" spc="-1" strike="noStrike">
-                <a:solidFill>
-                  <a:srgbClr val="000000"/>
-                </a:solidFill>
-                <a:latin typeface="Arial"/>
-              </a:rPr>
-              <a:t>Applicants must have the ability to track the real-time status of their bursary applications, ensuring transparency in the process.</a:t>
-            </a:r>
-            <a:endParaRPr b="0" lang="en-US" sz="2000" spc="-1" strike="noStrike">
-              <a:solidFill>
-                <a:srgbClr val="000000"/>
-              </a:solidFill>
-              <a:latin typeface="Arial"/>
-            </a:endParaRPr>
-          </a:p>
-          <a:p>
-            <a:pPr marL="306720" indent="-230040">
+              <a:rPr b="1" lang="en-US" sz="1600" spc="-1" strike="noStrike">
+                <a:solidFill>
+                  <a:srgbClr val="000000"/>
+                </a:solidFill>
+                <a:latin typeface="Arial"/>
+              </a:rPr>
+              <a:t>Response Time:</a:t>
+            </a:r>
+            <a:r>
+              <a:rPr b="0" lang="en-US" sz="1600" spc="-1" strike="noStrike">
+                <a:solidFill>
+                  <a:srgbClr val="000000"/>
+                </a:solidFill>
+                <a:latin typeface="Arial"/>
+              </a:rPr>
+              <a:t>The portal shall provide a response time of not more than 5 seconds for any user-initiated action.</a:t>
+            </a:r>
+            <a:endParaRPr b="0" lang="en-US" sz="1600" spc="-1" strike="noStrike">
+              <a:solidFill>
+                <a:srgbClr val="000000"/>
+              </a:solidFill>
+              <a:latin typeface="Arial"/>
+            </a:endParaRPr>
+          </a:p>
+          <a:p>
+            <a:pPr marL="432000" indent="-324000">
               <a:spcAft>
                 <a:spcPts val="1057"/>
               </a:spcAft>
@@ -7090,32 +6970,32 @@
               <a:buChar char=""/>
             </a:pPr>
             <a:r>
-              <a:rPr b="1" lang="en-US" sz="2000" spc="-1" strike="noStrike">
-                <a:solidFill>
-                  <a:srgbClr val="000000"/>
-                </a:solidFill>
-                <a:latin typeface="Arial"/>
-              </a:rPr>
-              <a:t>Online Application Submission: </a:t>
-            </a:r>
-            <a:r>
-              <a:rPr b="0" lang="en-US" sz="2000" spc="-1" strike="noStrike">
-                <a:solidFill>
-                  <a:srgbClr val="000000"/>
-                </a:solidFill>
-                <a:latin typeface="Arial"/>
-              </a:rPr>
-              <a:t>The system should facilitate the submission of bursary applications online, capturing essential details like National ID, Student Registration Number, and Institution Information.</a:t>
-            </a:r>
-            <a:endParaRPr b="0" lang="en-US" sz="2000" spc="-1" strike="noStrike">
-              <a:solidFill>
-                <a:srgbClr val="000000"/>
-              </a:solidFill>
-              <a:latin typeface="Arial"/>
-            </a:endParaRPr>
-          </a:p>
-          <a:p>
-            <a:pPr marL="306720" indent="-230040">
+              <a:rPr b="1" lang="en-US" sz="1600" spc="-1" strike="noStrike">
+                <a:solidFill>
+                  <a:srgbClr val="000000"/>
+                </a:solidFill>
+                <a:latin typeface="Arial"/>
+              </a:rPr>
+              <a:t>Scalability:</a:t>
+            </a:r>
+            <a:r>
+              <a:rPr b="0" lang="en-US" sz="1600" spc="-1" strike="noStrike">
+                <a:solidFill>
+                  <a:srgbClr val="000000"/>
+                </a:solidFill>
+                <a:latin typeface="Arial"/>
+              </a:rPr>
+              <a:t>The portal must be able to handle concurrent user loads of at least 500 users without significant degradation in performance.</a:t>
+            </a:r>
+            <a:endParaRPr b="0" lang="en-US" sz="1600" spc="-1" strike="noStrike">
+              <a:solidFill>
+                <a:srgbClr val="000000"/>
+              </a:solidFill>
+              <a:latin typeface="Arial"/>
+            </a:endParaRPr>
+          </a:p>
+          <a:p>
+            <a:pPr marL="432000" indent="-324000">
               <a:spcAft>
                 <a:spcPts val="1057"/>
               </a:spcAft>
@@ -7127,32 +7007,32 @@
               <a:buChar char=""/>
             </a:pPr>
             <a:r>
-              <a:rPr b="1" lang="en-US" sz="2000" spc="-1" strike="noStrike">
-                <a:solidFill>
-                  <a:srgbClr val="000000"/>
-                </a:solidFill>
-                <a:latin typeface="Arial"/>
-              </a:rPr>
-              <a:t>One-Time Application Restriction: </a:t>
-            </a:r>
-            <a:r>
-              <a:rPr b="0" lang="en-US" sz="2000" spc="-1" strike="noStrike">
-                <a:solidFill>
-                  <a:srgbClr val="000000"/>
-                </a:solidFill>
-                <a:latin typeface="Arial"/>
-              </a:rPr>
-              <a:t>National ID and Student Registration Numbers should be restricted to one-time applications per financial year to prevent duplications and ensure fairness.</a:t>
-            </a:r>
-            <a:endParaRPr b="0" lang="en-US" sz="2000" spc="-1" strike="noStrike">
-              <a:solidFill>
-                <a:srgbClr val="000000"/>
-              </a:solidFill>
-              <a:latin typeface="Arial"/>
-            </a:endParaRPr>
-          </a:p>
-          <a:p>
-            <a:pPr marL="306720" indent="-230040">
+              <a:rPr b="1" lang="en-US" sz="1600" spc="-1" strike="noStrike">
+                <a:solidFill>
+                  <a:srgbClr val="000000"/>
+                </a:solidFill>
+                <a:latin typeface="Arial"/>
+              </a:rPr>
+              <a:t>Throughput:</a:t>
+            </a:r>
+            <a:r>
+              <a:rPr b="0" lang="en-US" sz="1600" spc="-1" strike="noStrike">
+                <a:solidFill>
+                  <a:srgbClr val="000000"/>
+                </a:solidFill>
+                <a:latin typeface="Arial"/>
+              </a:rPr>
+              <a:t> The portal should be capable of processing at least 500 bursary applications per minute.</a:t>
+            </a:r>
+            <a:endParaRPr b="0" lang="en-US" sz="1600" spc="-1" strike="noStrike">
+              <a:solidFill>
+                <a:srgbClr val="000000"/>
+              </a:solidFill>
+              <a:latin typeface="Arial"/>
+            </a:endParaRPr>
+          </a:p>
+          <a:p>
+            <a:pPr marL="432000" indent="-324000">
               <a:spcAft>
                 <a:spcPts val="1057"/>
               </a:spcAft>
@@ -7164,98 +7044,24 @@
               <a:buChar char=""/>
             </a:pPr>
             <a:r>
-              <a:rPr b="1" lang="en-US" sz="2000" spc="-1" strike="noStrike">
-                <a:solidFill>
-                  <a:srgbClr val="000000"/>
-                </a:solidFill>
-                <a:latin typeface="Arial"/>
-              </a:rPr>
-              <a:t>Secure Database Management: </a:t>
-            </a:r>
-            <a:r>
-              <a:rPr b="0" lang="en-US" sz="2000" spc="-1" strike="noStrike">
-                <a:solidFill>
-                  <a:srgbClr val="000000"/>
-                </a:solidFill>
-                <a:latin typeface="Arial"/>
-              </a:rPr>
-              <a:t> Implement a secure database to store and manage applicant information, ensuring data privacy and integrity.</a:t>
-            </a:r>
-            <a:endParaRPr b="0" lang="en-US" sz="2000" spc="-1" strike="noStrike">
-              <a:solidFill>
-                <a:srgbClr val="000000"/>
-              </a:solidFill>
-              <a:latin typeface="Arial"/>
-            </a:endParaRPr>
-          </a:p>
-          <a:p>
-            <a:pPr marL="306720" indent="-230040">
-              <a:spcAft>
-                <a:spcPts val="1057"/>
-              </a:spcAft>
-              <a:buClr>
-                <a:srgbClr val="91d93f"/>
-              </a:buClr>
-              <a:buSzPct val="45000"/>
-              <a:buFont typeface="Wingdings" charset="2"/>
-              <a:buChar char=""/>
-            </a:pPr>
-            <a:r>
-              <a:rPr b="1" lang="en-US" sz="2000" spc="-1" strike="noStrike">
-                <a:solidFill>
-                  <a:srgbClr val="000000"/>
-                </a:solidFill>
-                <a:latin typeface="Arial"/>
-              </a:rPr>
-              <a:t>Comprehensive Reporting System: </a:t>
-            </a:r>
-            <a:r>
-              <a:rPr b="0" lang="en-US" sz="2000" spc="-1" strike="noStrike">
-                <a:solidFill>
-                  <a:srgbClr val="000000"/>
-                </a:solidFill>
-                <a:latin typeface="Arial"/>
-              </a:rPr>
-              <a:t>Generate detailed reports for successful applicants, containing relevant details such as student name, registration number, institution details, disbursed amounts, and dates.</a:t>
-            </a:r>
-            <a:endParaRPr b="0" lang="en-US" sz="2000" spc="-1" strike="noStrike">
-              <a:solidFill>
-                <a:srgbClr val="000000"/>
-              </a:solidFill>
-              <a:latin typeface="Arial"/>
-            </a:endParaRPr>
-          </a:p>
-          <a:p>
-            <a:pPr marL="306720" indent="-230040">
-              <a:spcAft>
-                <a:spcPts val="1057"/>
-              </a:spcAft>
-              <a:buClr>
-                <a:srgbClr val="91d93f"/>
-              </a:buClr>
-              <a:buSzPct val="45000"/>
-              <a:buFont typeface="Wingdings" charset="2"/>
-              <a:buChar char=""/>
-            </a:pPr>
-            <a:r>
-              <a:rPr b="1" lang="en-US" sz="2000" spc="-1" strike="noStrike">
-                <a:solidFill>
-                  <a:srgbClr val="000000"/>
-                </a:solidFill>
-                <a:latin typeface="Arial"/>
-              </a:rPr>
-              <a:t>User-Friendly Interface: </a:t>
-            </a:r>
-            <a:r>
-              <a:rPr b="0" lang="en-US" sz="2000" spc="-1" strike="noStrike">
-                <a:solidFill>
-                  <a:srgbClr val="000000"/>
-                </a:solidFill>
-                <a:latin typeface="Arial"/>
-              </a:rPr>
-              <a:t>Develop an intuitive and user-friendly interface to facilitate ease of use for applicants, ensuring inclusivity.</a:t>
-            </a:r>
-            <a:endParaRPr b="0" lang="en-US" sz="2000" spc="-1" strike="noStrike">
+              <a:rPr b="1" lang="en-US" sz="1600" spc="-1" strike="noStrike">
+                <a:solidFill>
+                  <a:srgbClr val="000000"/>
+                </a:solidFill>
+                <a:latin typeface="Arial"/>
+              </a:rPr>
+              <a:t>Data Retrieval Speed:</a:t>
+            </a:r>
+            <a:r>
+              <a:rPr b="0" lang="en-US" sz="1600" spc="-1" strike="noStrike">
+                <a:solidFill>
+                  <a:srgbClr val="000000"/>
+                </a:solidFill>
+                <a:latin typeface="Arial"/>
+              </a:rPr>
+              <a:t> Data retrieval operations (e.g, generating reports) should take not longer than 2 seconds, even when the database contains millions of records.</a:t>
+            </a:r>
+            <a:endParaRPr b="0" lang="en-US" sz="1600" spc="-1" strike="noStrike">
               <a:solidFill>
                 <a:srgbClr val="000000"/>
               </a:solidFill>
@@ -7296,7 +7102,7 @@
       </p:grpSpPr>
       <p:sp>
         <p:nvSpPr>
-          <p:cNvPr id="103" name="PlaceHolder 1"/>
+          <p:cNvPr id="98" name="PlaceHolder 1"/>
           <p:cNvSpPr>
             <a:spLocks noGrp="1"/>
           </p:cNvSpPr>
@@ -7345,7 +7151,7 @@
       </p:sp>
       <p:sp>
         <p:nvSpPr>
-          <p:cNvPr id="104" name="PlaceHolder 2"/>
+          <p:cNvPr id="99" name="PlaceHolder 2"/>
           <p:cNvSpPr>
             <a:spLocks noGrp="1"/>
           </p:cNvSpPr>
@@ -7368,17 +7174,17 @@
         </p:spPr>
         <p:txBody>
           <a:bodyPr lIns="0" rIns="0" tIns="0" bIns="0" anchor="t">
-            <a:normAutofit fontScale="88000"/>
-          </a:bodyPr>
-          <a:p>
-            <a:pPr marL="380160" indent="0">
-              <a:spcAft>
-                <a:spcPts val="1057"/>
-              </a:spcAft>
-              <a:buNone/>
-            </a:pPr>
-            <a:r>
-              <a:rPr b="1" lang="en-US" sz="2000" spc="-1" strike="noStrike">
+            <a:normAutofit/>
+          </a:bodyPr>
+          <a:p>
+            <a:pPr marL="432000" indent="0">
+              <a:spcAft>
+                <a:spcPts val="1057"/>
+              </a:spcAft>
+              <a:buNone/>
+            </a:pPr>
+            <a:r>
+              <a:rPr b="1" lang="en-US" sz="1600" spc="-1" strike="noStrike">
                 <a:solidFill>
                   <a:srgbClr val="000000"/>
                 </a:solidFill>
@@ -7386,15 +7192,38 @@
               </a:rPr>
               <a:t>6.2.2 Non-Functional Requirements</a:t>
             </a:r>
-            <a:endParaRPr b="0" lang="en-US" sz="2000" spc="-1" strike="noStrike">
-              <a:solidFill>
-                <a:srgbClr val="000000"/>
-              </a:solidFill>
-              <a:latin typeface="Arial"/>
-            </a:endParaRPr>
-          </a:p>
-          <a:p>
-            <a:pPr marL="380160" indent="-285120">
+            <a:endParaRPr b="0" lang="en-US" sz="1600" spc="-1" strike="noStrike">
+              <a:solidFill>
+                <a:srgbClr val="000000"/>
+              </a:solidFill>
+              <a:latin typeface="Arial"/>
+            </a:endParaRPr>
+          </a:p>
+          <a:p>
+            <a:pPr marL="432000" indent="0">
+              <a:spcAft>
+                <a:spcPts val="1057"/>
+              </a:spcAft>
+              <a:buNone/>
+            </a:pPr>
+            <a:r>
+              <a:rPr b="1" lang="en-US" sz="1600" spc="-1" strike="noStrike">
+                <a:solidFill>
+                  <a:srgbClr val="000000"/>
+                </a:solidFill>
+                <a:latin typeface="Arial"/>
+              </a:rPr>
+              <a:t>6.2.2.2 Safety Requirements</a:t>
+            </a:r>
+            <a:endParaRPr b="0" lang="en-US" sz="1600" spc="-1" strike="noStrike">
+              <a:solidFill>
+                <a:srgbClr val="000000"/>
+              </a:solidFill>
+              <a:latin typeface="Arial"/>
+            </a:endParaRPr>
+          </a:p>
+          <a:p>
+            <a:pPr marL="432000" indent="-324000">
               <a:spcAft>
                 <a:spcPts val="1057"/>
               </a:spcAft>
@@ -7406,32 +7235,32 @@
               <a:buChar char=""/>
             </a:pPr>
             <a:r>
-              <a:rPr b="1" lang="en-US" sz="2000" spc="-1" strike="noStrike">
-                <a:solidFill>
-                  <a:srgbClr val="000000"/>
-                </a:solidFill>
-                <a:latin typeface="Arial"/>
-              </a:rPr>
-              <a:t>Security:</a:t>
-            </a:r>
-            <a:r>
-              <a:rPr b="0" lang="en-US" sz="2000" spc="-1" strike="noStrike">
-                <a:solidFill>
-                  <a:srgbClr val="000000"/>
-                </a:solidFill>
-                <a:latin typeface="Arial"/>
-              </a:rPr>
-              <a:t> Implement robust security measures to protect user data, prevent unauthorized access, and ensure compliance with data protection regulations.</a:t>
-            </a:r>
-            <a:endParaRPr b="0" lang="en-US" sz="2000" spc="-1" strike="noStrike">
-              <a:solidFill>
-                <a:srgbClr val="000000"/>
-              </a:solidFill>
-              <a:latin typeface="Arial"/>
-            </a:endParaRPr>
-          </a:p>
-          <a:p>
-            <a:pPr marL="380160" indent="-285120">
+              <a:rPr b="1" lang="en-US" sz="1600" spc="-1" strike="noStrike">
+                <a:solidFill>
+                  <a:srgbClr val="000000"/>
+                </a:solidFill>
+                <a:latin typeface="Arial"/>
+              </a:rPr>
+              <a:t>Data Security: </a:t>
+            </a:r>
+            <a:r>
+              <a:rPr b="0" lang="en-US" sz="1600" spc="-1" strike="noStrike">
+                <a:solidFill>
+                  <a:srgbClr val="000000"/>
+                </a:solidFill>
+                <a:latin typeface="Arial"/>
+              </a:rPr>
+              <a:t>The portal must adhere to strict data security standards.</a:t>
+            </a:r>
+            <a:endParaRPr b="0" lang="en-US" sz="1600" spc="-1" strike="noStrike">
+              <a:solidFill>
+                <a:srgbClr val="000000"/>
+              </a:solidFill>
+              <a:latin typeface="Arial"/>
+            </a:endParaRPr>
+          </a:p>
+          <a:p>
+            <a:pPr marL="432000" indent="-324000">
               <a:spcAft>
                 <a:spcPts val="1057"/>
               </a:spcAft>
@@ -7443,135 +7272,24 @@
               <a:buChar char=""/>
             </a:pPr>
             <a:r>
-              <a:rPr b="1" lang="en-US" sz="2000" spc="-1" strike="noStrike">
-                <a:solidFill>
-                  <a:srgbClr val="000000"/>
-                </a:solidFill>
-                <a:latin typeface="Arial"/>
-              </a:rPr>
-              <a:t>Scalability: </a:t>
-            </a:r>
-            <a:r>
-              <a:rPr b="0" lang="en-US" sz="2000" spc="-1" strike="noStrike">
-                <a:solidFill>
-                  <a:srgbClr val="000000"/>
-                </a:solidFill>
-                <a:latin typeface="Arial"/>
-              </a:rPr>
-              <a:t>Design the system to handle a growing number of users and data, ensuring scalability for future expansion and increased demand.</a:t>
-            </a:r>
-            <a:endParaRPr b="0" lang="en-US" sz="2000" spc="-1" strike="noStrike">
-              <a:solidFill>
-                <a:srgbClr val="000000"/>
-              </a:solidFill>
-              <a:latin typeface="Arial"/>
-            </a:endParaRPr>
-          </a:p>
-          <a:p>
-            <a:pPr marL="380160" indent="-285120">
-              <a:spcAft>
-                <a:spcPts val="1057"/>
-              </a:spcAft>
-              <a:buClr>
-                <a:srgbClr val="91d93f"/>
-              </a:buClr>
-              <a:buSzPct val="45000"/>
-              <a:buFont typeface="Wingdings" charset="2"/>
-              <a:buChar char=""/>
-            </a:pPr>
-            <a:r>
-              <a:rPr b="1" lang="en-US" sz="2000" spc="-1" strike="noStrike">
-                <a:solidFill>
-                  <a:srgbClr val="000000"/>
-                </a:solidFill>
-                <a:latin typeface="Arial"/>
-              </a:rPr>
-              <a:t>Performance: </a:t>
-            </a:r>
-            <a:r>
-              <a:rPr b="0" lang="en-US" sz="2000" spc="-1" strike="noStrike">
-                <a:solidFill>
-                  <a:srgbClr val="000000"/>
-                </a:solidFill>
-                <a:latin typeface="Arial"/>
-              </a:rPr>
-              <a:t>Optimize system performance to deliver a responsive and efficient user experience, minimizing loading times and delays.</a:t>
-            </a:r>
-            <a:endParaRPr b="0" lang="en-US" sz="2000" spc="-1" strike="noStrike">
-              <a:solidFill>
-                <a:srgbClr val="000000"/>
-              </a:solidFill>
-              <a:latin typeface="Arial"/>
-            </a:endParaRPr>
-          </a:p>
-          <a:p>
-            <a:pPr marL="380160" indent="-285120">
-              <a:spcAft>
-                <a:spcPts val="1057"/>
-              </a:spcAft>
-              <a:buClr>
-                <a:srgbClr val="91d93f"/>
-              </a:buClr>
-              <a:buSzPct val="45000"/>
-              <a:buFont typeface="Wingdings" charset="2"/>
-              <a:buChar char=""/>
-            </a:pPr>
-            <a:r>
-              <a:rPr b="1" lang="en-US" sz="2000" spc="-1" strike="noStrike">
-                <a:solidFill>
-                  <a:srgbClr val="000000"/>
-                </a:solidFill>
-                <a:latin typeface="Arial"/>
-              </a:rPr>
-              <a:t>Compliance: </a:t>
-            </a:r>
-            <a:r>
-              <a:rPr b="0" lang="en-US" sz="2000" spc="-1" strike="noStrike">
-                <a:solidFill>
-                  <a:srgbClr val="000000"/>
-                </a:solidFill>
-                <a:latin typeface="Arial"/>
-              </a:rPr>
-              <a:t>Ensure compliance with relevant data protection and privacy regulations, maintaining ethical and legal standards in handling user data.</a:t>
-            </a:r>
-            <a:endParaRPr b="0" lang="en-US" sz="2000" spc="-1" strike="noStrike">
-              <a:solidFill>
-                <a:srgbClr val="000000"/>
-              </a:solidFill>
-              <a:latin typeface="Arial"/>
-            </a:endParaRPr>
-          </a:p>
-          <a:p>
-            <a:pPr marL="380160" indent="-285120">
-              <a:spcAft>
-                <a:spcPts val="1057"/>
-              </a:spcAft>
-              <a:buClr>
-                <a:srgbClr val="91d93f"/>
-              </a:buClr>
-              <a:buSzPct val="45000"/>
-              <a:buFont typeface="Wingdings" charset="2"/>
-              <a:buChar char=""/>
-            </a:pPr>
-            <a:r>
-              <a:rPr b="1" lang="en-US" sz="2000" spc="-1" strike="noStrike">
-                <a:solidFill>
-                  <a:srgbClr val="000000"/>
-                </a:solidFill>
-                <a:latin typeface="Arial"/>
-              </a:rPr>
-              <a:t>Technological Infrastructure: </a:t>
-            </a:r>
-            <a:r>
-              <a:rPr b="0" lang="en-US" sz="2000" spc="-1" strike="noStrike">
-                <a:solidFill>
-                  <a:srgbClr val="000000"/>
-                </a:solidFill>
-                <a:latin typeface="Arial"/>
-              </a:rPr>
-              <a:t>Implement the chosen technology stack (HTML, CSS, Javascript, Python, and Django Web Framework) to ensure a robust and reliable system.</a:t>
-            </a:r>
-            <a:endParaRPr b="0" lang="en-US" sz="2000" spc="-1" strike="noStrike">
+              <a:rPr b="1" lang="en-US" sz="1600" spc="-1" strike="noStrike">
+                <a:solidFill>
+                  <a:srgbClr val="000000"/>
+                </a:solidFill>
+                <a:latin typeface="Arial"/>
+              </a:rPr>
+              <a:t>Disaster recovery: </a:t>
+            </a:r>
+            <a:r>
+              <a:rPr b="0" lang="en-US" sz="1600" spc="-1" strike="noStrike">
+                <a:solidFill>
+                  <a:srgbClr val="000000"/>
+                </a:solidFill>
+                <a:latin typeface="Arial"/>
+              </a:rPr>
+              <a:t>The portal must have a robust disaster recovery plan in place to ensure business continuity.</a:t>
+            </a:r>
+            <a:endParaRPr b="0" lang="en-US" sz="1600" spc="-1" strike="noStrike">
               <a:solidFill>
                 <a:srgbClr val="000000"/>
               </a:solidFill>
@@ -7612,7 +7330,7 @@
       </p:grpSpPr>
       <p:sp>
         <p:nvSpPr>
-          <p:cNvPr id="105" name="PlaceHolder 1"/>
+          <p:cNvPr id="100" name="PlaceHolder 1"/>
           <p:cNvSpPr>
             <a:spLocks noGrp="1"/>
           </p:cNvSpPr>
@@ -7661,7 +7379,7 @@
       </p:sp>
       <p:pic>
         <p:nvPicPr>
-          <p:cNvPr id="106" name="" descr=""/>
+          <p:cNvPr id="101" name="" descr=""/>
           <p:cNvPicPr/>
           <p:nvPr/>
         </p:nvPicPr>
@@ -7714,7 +7432,7 @@
       </p:grpSpPr>
       <p:sp>
         <p:nvSpPr>
-          <p:cNvPr id="107" name="PlaceHolder 1"/>
+          <p:cNvPr id="102" name="PlaceHolder 1"/>
           <p:cNvSpPr>
             <a:spLocks noGrp="1"/>
           </p:cNvSpPr>
@@ -7763,7 +7481,7 @@
       </p:sp>
       <p:pic>
         <p:nvPicPr>
-          <p:cNvPr id="108" name="" descr=""/>
+          <p:cNvPr id="103" name="" descr=""/>
           <p:cNvPicPr/>
           <p:nvPr/>
         </p:nvPicPr>
